--- a/public/lessons/year-6-maths/autumn/week-4/interpret-division-remainders/teaching-powerpoint-v1.pptx
+++ b/public/lessons/year-6-maths/autumn/week-4/interpret-division-remainders/teaching-powerpoint-v1.pptx
@@ -2,24 +2,24 @@
 <file path=ppt/presentation.xml><?xml version="1.0" encoding="utf-8"?>
 <p:presentation xmlns:p="http://schemas.openxmlformats.org/presentationml/2006/main">
   <p:sldMasterIdLst>
-    <p:sldMasterId xmlns:r="http://schemas.openxmlformats.org/officeDocument/2006/relationships" id="2147483648" r:id="Ra28f6d75802741b7"/>
+    <p:sldMasterId xmlns:r="http://schemas.openxmlformats.org/officeDocument/2006/relationships" id="2147483648" r:id="Rb825c2e229f04215"/>
   </p:sldMasterIdLst>
   <p:notesMasterIdLst>
-    <p:notesMasterId xmlns:r="http://schemas.openxmlformats.org/officeDocument/2006/relationships" r:id="R98d7db233f3241a8"/>
+    <p:notesMasterId xmlns:r="http://schemas.openxmlformats.org/officeDocument/2006/relationships" r:id="R96075d2336414931"/>
   </p:notesMasterIdLst>
   <p:sldIdLst>
-    <p:sldId xmlns:r="http://schemas.openxmlformats.org/officeDocument/2006/relationships" id="256" r:id="Re5db0481f0f54ed9"/>
-    <p:sldId xmlns:r="http://schemas.openxmlformats.org/officeDocument/2006/relationships" id="257" r:id="Rb1b89dd4d4b542fb"/>
-    <p:sldId xmlns:r="http://schemas.openxmlformats.org/officeDocument/2006/relationships" id="258" r:id="R4d408a761ded4633"/>
-    <p:sldId xmlns:r="http://schemas.openxmlformats.org/officeDocument/2006/relationships" id="259" r:id="R09e16449dc3d49df"/>
-    <p:sldId xmlns:r="http://schemas.openxmlformats.org/officeDocument/2006/relationships" id="260" r:id="R8e8df43783bd436e"/>
-    <p:sldId xmlns:r="http://schemas.openxmlformats.org/officeDocument/2006/relationships" id="261" r:id="Rff3f6942b3964112"/>
-    <p:sldId xmlns:r="http://schemas.openxmlformats.org/officeDocument/2006/relationships" id="262" r:id="R5edc297df51a4241"/>
-    <p:sldId xmlns:r="http://schemas.openxmlformats.org/officeDocument/2006/relationships" id="263" r:id="Rb05e310d990649c9"/>
-    <p:sldId xmlns:r="http://schemas.openxmlformats.org/officeDocument/2006/relationships" id="264" r:id="Rb0e8df0fcd984b9f"/>
-    <p:sldId xmlns:r="http://schemas.openxmlformats.org/officeDocument/2006/relationships" id="265" r:id="Rec89fc6c2d6146db"/>
-    <p:sldId xmlns:r="http://schemas.openxmlformats.org/officeDocument/2006/relationships" id="266" r:id="R87163ed238454be9"/>
-    <p:sldId xmlns:r="http://schemas.openxmlformats.org/officeDocument/2006/relationships" id="267" r:id="Reced65a94a61444a"/>
+    <p:sldId xmlns:r="http://schemas.openxmlformats.org/officeDocument/2006/relationships" id="256" r:id="R60849cbfed204270"/>
+    <p:sldId xmlns:r="http://schemas.openxmlformats.org/officeDocument/2006/relationships" id="257" r:id="Re304dfecffc745a1"/>
+    <p:sldId xmlns:r="http://schemas.openxmlformats.org/officeDocument/2006/relationships" id="258" r:id="R6ffd3345a84643f0"/>
+    <p:sldId xmlns:r="http://schemas.openxmlformats.org/officeDocument/2006/relationships" id="259" r:id="R8ae1febc485446fb"/>
+    <p:sldId xmlns:r="http://schemas.openxmlformats.org/officeDocument/2006/relationships" id="260" r:id="R6abc86ace420493f"/>
+    <p:sldId xmlns:r="http://schemas.openxmlformats.org/officeDocument/2006/relationships" id="261" r:id="R2ea837742c5c45a6"/>
+    <p:sldId xmlns:r="http://schemas.openxmlformats.org/officeDocument/2006/relationships" id="262" r:id="R23600574b0634b48"/>
+    <p:sldId xmlns:r="http://schemas.openxmlformats.org/officeDocument/2006/relationships" id="263" r:id="R38dd8ab63d714998"/>
+    <p:sldId xmlns:r="http://schemas.openxmlformats.org/officeDocument/2006/relationships" id="264" r:id="R72d7da218e8642f0"/>
+    <p:sldId xmlns:r="http://schemas.openxmlformats.org/officeDocument/2006/relationships" id="265" r:id="Rc3cfb802a0b04320"/>
+    <p:sldId xmlns:r="http://schemas.openxmlformats.org/officeDocument/2006/relationships" id="266" r:id="R5ad6e4e733a44e52"/>
+    <p:sldId xmlns:r="http://schemas.openxmlformats.org/officeDocument/2006/relationships" id="267" r:id="R5505b648d16f402d"/>
   </p:sldIdLst>
   <p:sldSz cx="12192000" cy="6858000"/>
   <p:notesSz cx="6858000" cy="9144000"/>
@@ -873,7 +873,7 @@
           <a:lstStyle xmlns:a="http://schemas.openxmlformats.org/drawingml/2006/main"/>
           <a:p xmlns:a="http://schemas.openxmlformats.org/drawingml/2006/main">
             <a:r>
-              <a:t>I do. Reveal the question, setup and each calculation stage one click at a time. Pupils watch before copying. Model answer: 210 remainder 25, so 211 coaches are needed.</a:t>
+              <a:t>I do. Reveal the question, then reveal each mathematical change one click at a time. Point to the numbers and operation that changed before moving to the next line. Final answer: 210 remainder 25, so 211 coaches are needed.</a:t>
             </a:r>
           </a:p>
         </p:txBody>
@@ -1291,7 +1291,7 @@
   </p:cSld>
   <p:clrMap bg1="lt1" tx1="dk1" bg2="lt2" tx2="dk2" accent1="accent1" accent2="accent2" accent3="accent3" accent4="accent4" accent5="accent5" accent6="accent6" hlink="hlink" folHlink="folHlink"/>
   <p:sldLayoutIdLst>
-    <p:sldLayoutId xmlns:r="http://schemas.openxmlformats.org/officeDocument/2006/relationships" id="2147483649" r:id="R9bccf48c878b4cd4"/>
+    <p:sldLayoutId xmlns:r="http://schemas.openxmlformats.org/officeDocument/2006/relationships" id="2147483649" r:id="Rda82917597f8470a"/>
   </p:sldLayoutIdLst>
   <p:txStyles>
     <p:titleStyle>
@@ -1842,7 +1842,7 @@
           <p:cNvPr id="12" name="">
             <a:extLst xmlns:a="http://schemas.openxmlformats.org/drawingml/2006/main">
               <a:ext uri="{FF2B5EF4-FFF2-40B4-BE49-F238E27FC236}">
-                <a16:creationId xmlns:a16="http://schemas.microsoft.com/office/drawing/2014/main" id="{1DF3F3FB-ACBD-4E91-A7A6-E2980D98434C}"/>
+                <a16:creationId xmlns:a16="http://schemas.microsoft.com/office/drawing/2014/main" id="{A8699E07-E95A-4A0F-8203-FE48DDA8756C}"/>
               </a:ext>
             </a:extLst>
           </p:cNvPr>
@@ -1874,7 +1874,7 @@
           <p:cNvPr id="2" name="">
             <a:extLst xmlns:a="http://schemas.openxmlformats.org/drawingml/2006/main">
               <a:ext uri="{FF2B5EF4-FFF2-40B4-BE49-F238E27FC236}">
-                <a16:creationId xmlns:a16="http://schemas.microsoft.com/office/drawing/2014/main" id="{4AC26130-8812-4E91-BF3C-22DD283798DF}"/>
+                <a16:creationId xmlns:a16="http://schemas.microsoft.com/office/drawing/2014/main" id="{07AE76CC-CC80-45D5-84E8-3DEB2BF5F3B1}"/>
               </a:ext>
             </a:extLst>
           </p:cNvPr>
@@ -1931,7 +1931,7 @@
           <p:cNvPr id="3" name="">
             <a:extLst xmlns:a="http://schemas.openxmlformats.org/drawingml/2006/main">
               <a:ext uri="{FF2B5EF4-FFF2-40B4-BE49-F238E27FC236}">
-                <a16:creationId xmlns:a16="http://schemas.microsoft.com/office/drawing/2014/main" id="{8AF081B6-4F9D-46B0-8A6F-B86BE2CB8056}"/>
+                <a16:creationId xmlns:a16="http://schemas.microsoft.com/office/drawing/2014/main" id="{57D76CF2-09E2-4253-A6E2-CADCF4F963A4}"/>
               </a:ext>
             </a:extLst>
           </p:cNvPr>
@@ -1965,7 +1965,7 @@
           <p:cNvPr id="4" name="">
             <a:extLst xmlns:a="http://schemas.openxmlformats.org/drawingml/2006/main">
               <a:ext uri="{FF2B5EF4-FFF2-40B4-BE49-F238E27FC236}">
-                <a16:creationId xmlns:a16="http://schemas.microsoft.com/office/drawing/2014/main" id="{9ED64943-6CA2-451B-89D5-1E39F05A85A4}"/>
+                <a16:creationId xmlns:a16="http://schemas.microsoft.com/office/drawing/2014/main" id="{767087DF-3519-4C26-8643-C253CA9A8AE4}"/>
               </a:ext>
             </a:extLst>
           </p:cNvPr>
@@ -2022,7 +2022,7 @@
           <p:cNvPr id="5" name="">
             <a:extLst xmlns:a="http://schemas.openxmlformats.org/drawingml/2006/main">
               <a:ext uri="{FF2B5EF4-FFF2-40B4-BE49-F238E27FC236}">
-                <a16:creationId xmlns:a16="http://schemas.microsoft.com/office/drawing/2014/main" id="{8DFBD6BF-7995-4823-AADC-0724F529037A}"/>
+                <a16:creationId xmlns:a16="http://schemas.microsoft.com/office/drawing/2014/main" id="{60ADCB39-9AB7-48B1-8EB9-361EB1BE06B3}"/>
               </a:ext>
             </a:extLst>
           </p:cNvPr>
@@ -2079,7 +2079,7 @@
           <p:cNvPr id="6" name="">
             <a:extLst xmlns:a="http://schemas.openxmlformats.org/drawingml/2006/main">
               <a:ext uri="{FF2B5EF4-FFF2-40B4-BE49-F238E27FC236}">
-                <a16:creationId xmlns:a16="http://schemas.microsoft.com/office/drawing/2014/main" id="{8189B7CB-6A48-4ADB-BEDD-2F568A4A72CC}"/>
+                <a16:creationId xmlns:a16="http://schemas.microsoft.com/office/drawing/2014/main" id="{7043ADE7-6972-4493-90FF-19AF1FEBAC38}"/>
               </a:ext>
             </a:extLst>
           </p:cNvPr>
@@ -2113,7 +2113,7 @@
           <p:cNvPr id="7" name="">
             <a:extLst xmlns:a="http://schemas.openxmlformats.org/drawingml/2006/main">
               <a:ext uri="{FF2B5EF4-FFF2-40B4-BE49-F238E27FC236}">
-                <a16:creationId xmlns:a16="http://schemas.microsoft.com/office/drawing/2014/main" id="{E7A571EE-DA7E-4166-9E8E-DBF4E0402A76}"/>
+                <a16:creationId xmlns:a16="http://schemas.microsoft.com/office/drawing/2014/main" id="{469FB6F7-E33F-4E9D-97F6-9EE450C227A2}"/>
               </a:ext>
             </a:extLst>
           </p:cNvPr>
@@ -2170,7 +2170,7 @@
           <p:cNvPr id="8" name="">
             <a:extLst xmlns:a="http://schemas.openxmlformats.org/drawingml/2006/main">
               <a:ext uri="{FF2B5EF4-FFF2-40B4-BE49-F238E27FC236}">
-                <a16:creationId xmlns:a16="http://schemas.microsoft.com/office/drawing/2014/main" id="{86863BDD-F335-4816-981D-57483A28AF46}"/>
+                <a16:creationId xmlns:a16="http://schemas.microsoft.com/office/drawing/2014/main" id="{4BD0F0D6-C017-426E-957E-4497AA26C4BE}"/>
               </a:ext>
             </a:extLst>
           </p:cNvPr>
@@ -2227,7 +2227,7 @@
           <p:cNvPr id="9" name="">
             <a:extLst xmlns:a="http://schemas.openxmlformats.org/drawingml/2006/main">
               <a:ext uri="{FF2B5EF4-FFF2-40B4-BE49-F238E27FC236}">
-                <a16:creationId xmlns:a16="http://schemas.microsoft.com/office/drawing/2014/main" id="{B79952A6-0406-400E-985D-A72435F8B39A}"/>
+                <a16:creationId xmlns:a16="http://schemas.microsoft.com/office/drawing/2014/main" id="{C5ED1863-4057-44F4-A767-4B794B49CA9D}"/>
               </a:ext>
             </a:extLst>
           </p:cNvPr>
@@ -2284,7 +2284,7 @@
           <p:cNvPr id="10" name="">
             <a:extLst xmlns:a="http://schemas.openxmlformats.org/drawingml/2006/main">
               <a:ext uri="{FF2B5EF4-FFF2-40B4-BE49-F238E27FC236}">
-                <a16:creationId xmlns:a16="http://schemas.microsoft.com/office/drawing/2014/main" id="{50174E2A-A873-4187-9828-977903F95453}"/>
+                <a16:creationId xmlns:a16="http://schemas.microsoft.com/office/drawing/2014/main" id="{BAE00597-220C-4033-AEC8-D5E35FB7D48C}"/>
               </a:ext>
             </a:extLst>
           </p:cNvPr>
@@ -2341,7 +2341,7 @@
           <p:cNvPr id="11" name="">
             <a:extLst xmlns:a="http://schemas.openxmlformats.org/drawingml/2006/main">
               <a:ext uri="{FF2B5EF4-FFF2-40B4-BE49-F238E27FC236}">
-                <a16:creationId xmlns:a16="http://schemas.microsoft.com/office/drawing/2014/main" id="{93A2D311-C572-4B6E-93BE-9C96F89B2C4F}"/>
+                <a16:creationId xmlns:a16="http://schemas.microsoft.com/office/drawing/2014/main" id="{83A60493-4A03-4C81-88FD-596C45838F5F}"/>
               </a:ext>
             </a:extLst>
           </p:cNvPr>
@@ -2396,7 +2396,7 @@
     </p:spTree>
     <p:extLst>
       <p:ext uri="{BB962C8B-B14F-4D97-AF65-F5344CB8AC3E}">
-        <p14:creationId xmlns:p14="http://schemas.microsoft.com/office/powerpoint/2010/main" val="1521377686"/>
+        <p14:creationId xmlns:p14="http://schemas.microsoft.com/office/powerpoint/2010/main" val="1045462815"/>
       </p:ext>
     </p:extLst>
   </p:cSld>
@@ -2427,7 +2427,7 @@
           <p:cNvPr id="14" name="">
             <a:extLst xmlns:a="http://schemas.openxmlformats.org/drawingml/2006/main">
               <a:ext uri="{FF2B5EF4-FFF2-40B4-BE49-F238E27FC236}">
-                <a16:creationId xmlns:a16="http://schemas.microsoft.com/office/drawing/2014/main" id="{5080E5F9-099A-4FEB-9AD0-7794CB7295A8}"/>
+                <a16:creationId xmlns:a16="http://schemas.microsoft.com/office/drawing/2014/main" id="{E34D8343-E3E9-4774-9991-C10BD8EBE742}"/>
               </a:ext>
             </a:extLst>
           </p:cNvPr>
@@ -2459,7 +2459,7 @@
           <p:cNvPr id="2" name="">
             <a:extLst xmlns:a="http://schemas.openxmlformats.org/drawingml/2006/main">
               <a:ext uri="{FF2B5EF4-FFF2-40B4-BE49-F238E27FC236}">
-                <a16:creationId xmlns:a16="http://schemas.microsoft.com/office/drawing/2014/main" id="{891DFDF4-D3E5-4CD8-8CC9-128306410D8F}"/>
+                <a16:creationId xmlns:a16="http://schemas.microsoft.com/office/drawing/2014/main" id="{3DC44B23-1FB0-44CC-80CE-BF2E2095D601}"/>
               </a:ext>
             </a:extLst>
           </p:cNvPr>
@@ -2516,7 +2516,7 @@
           <p:cNvPr id="3" name="">
             <a:extLst xmlns:a="http://schemas.openxmlformats.org/drawingml/2006/main">
               <a:ext uri="{FF2B5EF4-FFF2-40B4-BE49-F238E27FC236}">
-                <a16:creationId xmlns:a16="http://schemas.microsoft.com/office/drawing/2014/main" id="{1B99B01A-07EC-4D37-A5F5-E6BCD364C8A2}"/>
+                <a16:creationId xmlns:a16="http://schemas.microsoft.com/office/drawing/2014/main" id="{DDE9D0F9-2C6B-4570-8974-180EE37A2612}"/>
               </a:ext>
             </a:extLst>
           </p:cNvPr>
@@ -2548,7 +2548,7 @@
           <p:cNvPr id="4" name="">
             <a:extLst xmlns:a="http://schemas.openxmlformats.org/drawingml/2006/main">
               <a:ext uri="{FF2B5EF4-FFF2-40B4-BE49-F238E27FC236}">
-                <a16:creationId xmlns:a16="http://schemas.microsoft.com/office/drawing/2014/main" id="{5F8598A8-145F-4217-B453-345404B43B67}"/>
+                <a16:creationId xmlns:a16="http://schemas.microsoft.com/office/drawing/2014/main" id="{CA7BCBB2-5048-49D1-99EB-49A6502FD513}"/>
               </a:ext>
             </a:extLst>
           </p:cNvPr>
@@ -2605,7 +2605,7 @@
           <p:cNvPr id="5" name="">
             <a:extLst xmlns:a="http://schemas.openxmlformats.org/drawingml/2006/main">
               <a:ext uri="{FF2B5EF4-FFF2-40B4-BE49-F238E27FC236}">
-                <a16:creationId xmlns:a16="http://schemas.microsoft.com/office/drawing/2014/main" id="{67F21500-6E9E-4095-93A5-AC60EFAD5E0E}"/>
+                <a16:creationId xmlns:a16="http://schemas.microsoft.com/office/drawing/2014/main" id="{9E4BE6B4-3983-49C9-867B-D2B34AE8E68F}"/>
               </a:ext>
             </a:extLst>
           </p:cNvPr>
@@ -2662,7 +2662,7 @@
           <p:cNvPr id="6" name="">
             <a:extLst xmlns:a="http://schemas.openxmlformats.org/drawingml/2006/main">
               <a:ext uri="{FF2B5EF4-FFF2-40B4-BE49-F238E27FC236}">
-                <a16:creationId xmlns:a16="http://schemas.microsoft.com/office/drawing/2014/main" id="{24E3FAF9-440D-4C67-8535-E90C51B55D9B}"/>
+                <a16:creationId xmlns:a16="http://schemas.microsoft.com/office/drawing/2014/main" id="{67AC7836-DE2A-48E1-868F-DF1B4BFB26F9}"/>
               </a:ext>
             </a:extLst>
           </p:cNvPr>
@@ -2719,7 +2719,7 @@
           <p:cNvPr id="7" name="">
             <a:extLst xmlns:a="http://schemas.openxmlformats.org/drawingml/2006/main">
               <a:ext uri="{FF2B5EF4-FFF2-40B4-BE49-F238E27FC236}">
-                <a16:creationId xmlns:a16="http://schemas.microsoft.com/office/drawing/2014/main" id="{5CA6B93B-0228-421B-B680-0C0EEB19F84B}"/>
+                <a16:creationId xmlns:a16="http://schemas.microsoft.com/office/drawing/2014/main" id="{90065E0A-7CDC-4C1A-96B9-18938DC39FD8}"/>
               </a:ext>
             </a:extLst>
           </p:cNvPr>
@@ -2751,7 +2751,7 @@
           <p:cNvPr id="8" name="">
             <a:extLst xmlns:a="http://schemas.openxmlformats.org/drawingml/2006/main">
               <a:ext uri="{FF2B5EF4-FFF2-40B4-BE49-F238E27FC236}">
-                <a16:creationId xmlns:a16="http://schemas.microsoft.com/office/drawing/2014/main" id="{0C0E3A84-5FD7-49D6-BB5C-0C3EFB3448FA}"/>
+                <a16:creationId xmlns:a16="http://schemas.microsoft.com/office/drawing/2014/main" id="{DFA81757-A48D-4957-929E-0C1BFF4CEA10}"/>
               </a:ext>
             </a:extLst>
           </p:cNvPr>
@@ -2808,7 +2808,7 @@
           <p:cNvPr id="9" name="">
             <a:extLst xmlns:a="http://schemas.openxmlformats.org/drawingml/2006/main">
               <a:ext uri="{FF2B5EF4-FFF2-40B4-BE49-F238E27FC236}">
-                <a16:creationId xmlns:a16="http://schemas.microsoft.com/office/drawing/2014/main" id="{86E2AA2B-88BA-430B-9E15-EE99AF6154C1}"/>
+                <a16:creationId xmlns:a16="http://schemas.microsoft.com/office/drawing/2014/main" id="{D850E1C9-4C41-4FEC-801F-BB6B01F912DC}"/>
               </a:ext>
             </a:extLst>
           </p:cNvPr>
@@ -2865,7 +2865,7 @@
           <p:cNvPr id="10" name="">
             <a:extLst xmlns:a="http://schemas.openxmlformats.org/drawingml/2006/main">
               <a:ext uri="{FF2B5EF4-FFF2-40B4-BE49-F238E27FC236}">
-                <a16:creationId xmlns:a16="http://schemas.microsoft.com/office/drawing/2014/main" id="{6E6BDBDA-B1C6-470D-897A-581EF366EE13}"/>
+                <a16:creationId xmlns:a16="http://schemas.microsoft.com/office/drawing/2014/main" id="{6043C38D-53CB-48AA-AA5B-DF6A3FD64C1C}"/>
               </a:ext>
             </a:extLst>
           </p:cNvPr>
@@ -2922,7 +2922,7 @@
           <p:cNvPr id="11" name="">
             <a:extLst xmlns:a="http://schemas.openxmlformats.org/drawingml/2006/main">
               <a:ext uri="{FF2B5EF4-FFF2-40B4-BE49-F238E27FC236}">
-                <a16:creationId xmlns:a16="http://schemas.microsoft.com/office/drawing/2014/main" id="{90EA6FDB-28D4-4F7B-9C08-4FF885E3786E}"/>
+                <a16:creationId xmlns:a16="http://schemas.microsoft.com/office/drawing/2014/main" id="{79DCA8EC-1276-42F1-973F-3457C5D939C2}"/>
               </a:ext>
             </a:extLst>
           </p:cNvPr>
@@ -2979,7 +2979,7 @@
           <p:cNvPr id="12" name="">
             <a:extLst xmlns:a="http://schemas.openxmlformats.org/drawingml/2006/main">
               <a:ext uri="{FF2B5EF4-FFF2-40B4-BE49-F238E27FC236}">
-                <a16:creationId xmlns:a16="http://schemas.microsoft.com/office/drawing/2014/main" id="{AEB2B5A7-592A-4206-B37F-EB7872421A58}"/>
+                <a16:creationId xmlns:a16="http://schemas.microsoft.com/office/drawing/2014/main" id="{CAD6361C-F0F0-4CFE-B367-3424B16777ED}"/>
               </a:ext>
             </a:extLst>
           </p:cNvPr>
@@ -3036,7 +3036,7 @@
           <p:cNvPr id="13" name="">
             <a:extLst xmlns:a="http://schemas.openxmlformats.org/drawingml/2006/main">
               <a:ext uri="{FF2B5EF4-FFF2-40B4-BE49-F238E27FC236}">
-                <a16:creationId xmlns:a16="http://schemas.microsoft.com/office/drawing/2014/main" id="{73EB411F-6E6A-44B0-A244-759BC6BCBFED}"/>
+                <a16:creationId xmlns:a16="http://schemas.microsoft.com/office/drawing/2014/main" id="{847CE133-B9DE-44E8-9D99-37BEF947FDC3}"/>
               </a:ext>
             </a:extLst>
           </p:cNvPr>
@@ -3091,7 +3091,7 @@
     </p:spTree>
     <p:extLst>
       <p:ext uri="{BB962C8B-B14F-4D97-AF65-F5344CB8AC3E}">
-        <p14:creationId xmlns:p14="http://schemas.microsoft.com/office/powerpoint/2010/main" val="269198140"/>
+        <p14:creationId xmlns:p14="http://schemas.microsoft.com/office/powerpoint/2010/main" val="484302145"/>
       </p:ext>
     </p:extLst>
   </p:cSld>
@@ -3292,7 +3292,7 @@
           <p:cNvPr id="19" name="">
             <a:extLst xmlns:a="http://schemas.openxmlformats.org/drawingml/2006/main">
               <a:ext uri="{FF2B5EF4-FFF2-40B4-BE49-F238E27FC236}">
-                <a16:creationId xmlns:a16="http://schemas.microsoft.com/office/drawing/2014/main" id="{AAE3370A-61A1-4DEB-B067-8B3B504D1964}"/>
+                <a16:creationId xmlns:a16="http://schemas.microsoft.com/office/drawing/2014/main" id="{D0DF409F-A594-4F43-A1FE-7562CAC3F790}"/>
               </a:ext>
             </a:extLst>
           </p:cNvPr>
@@ -3324,7 +3324,7 @@
           <p:cNvPr id="2" name="">
             <a:extLst xmlns:a="http://schemas.openxmlformats.org/drawingml/2006/main">
               <a:ext uri="{FF2B5EF4-FFF2-40B4-BE49-F238E27FC236}">
-                <a16:creationId xmlns:a16="http://schemas.microsoft.com/office/drawing/2014/main" id="{3A765EE4-6CDE-4BC9-94CA-20519560F402}"/>
+                <a16:creationId xmlns:a16="http://schemas.microsoft.com/office/drawing/2014/main" id="{68E8A85D-236A-486D-9A79-D60AC7156D0F}"/>
               </a:ext>
             </a:extLst>
           </p:cNvPr>
@@ -3381,7 +3381,7 @@
           <p:cNvPr id="3" name="">
             <a:extLst xmlns:a="http://schemas.openxmlformats.org/drawingml/2006/main">
               <a:ext uri="{FF2B5EF4-FFF2-40B4-BE49-F238E27FC236}">
-                <a16:creationId xmlns:a16="http://schemas.microsoft.com/office/drawing/2014/main" id="{57BB15BE-AA26-4F06-8A5B-5E69EA87942E}"/>
+                <a16:creationId xmlns:a16="http://schemas.microsoft.com/office/drawing/2014/main" id="{FD2FA8ED-4A26-44F7-B850-B2AB480DE935}"/>
               </a:ext>
             </a:extLst>
           </p:cNvPr>
@@ -3413,7 +3413,7 @@
           <p:cNvPr id="4" name="">
             <a:extLst xmlns:a="http://schemas.openxmlformats.org/drawingml/2006/main">
               <a:ext uri="{FF2B5EF4-FFF2-40B4-BE49-F238E27FC236}">
-                <a16:creationId xmlns:a16="http://schemas.microsoft.com/office/drawing/2014/main" id="{F6365A66-2A15-49A6-BC73-CAA062DB1B47}"/>
+                <a16:creationId xmlns:a16="http://schemas.microsoft.com/office/drawing/2014/main" id="{FBADA117-CFBE-4E2F-B1EA-36BA74037E3C}"/>
               </a:ext>
             </a:extLst>
           </p:cNvPr>
@@ -3470,7 +3470,7 @@
           <p:cNvPr id="5" name="">
             <a:extLst xmlns:a="http://schemas.openxmlformats.org/drawingml/2006/main">
               <a:ext uri="{FF2B5EF4-FFF2-40B4-BE49-F238E27FC236}">
-                <a16:creationId xmlns:a16="http://schemas.microsoft.com/office/drawing/2014/main" id="{8D7F719C-DAB7-4B1F-BA90-E870AAD199D7}"/>
+                <a16:creationId xmlns:a16="http://schemas.microsoft.com/office/drawing/2014/main" id="{B8233583-5E34-47C6-8C3B-6600BC24C745}"/>
               </a:ext>
             </a:extLst>
           </p:cNvPr>
@@ -3527,7 +3527,7 @@
           <p:cNvPr id="6" name="">
             <a:extLst xmlns:a="http://schemas.openxmlformats.org/drawingml/2006/main">
               <a:ext uri="{FF2B5EF4-FFF2-40B4-BE49-F238E27FC236}">
-                <a16:creationId xmlns:a16="http://schemas.microsoft.com/office/drawing/2014/main" id="{1B13469B-14A8-4999-B573-EDEA2B40C49A}"/>
+                <a16:creationId xmlns:a16="http://schemas.microsoft.com/office/drawing/2014/main" id="{85E4C013-C3F5-449E-8188-F9F5C91CDEEC}"/>
               </a:ext>
             </a:extLst>
           </p:cNvPr>
@@ -3584,7 +3584,7 @@
           <p:cNvPr id="7" name="">
             <a:extLst xmlns:a="http://schemas.openxmlformats.org/drawingml/2006/main">
               <a:ext uri="{FF2B5EF4-FFF2-40B4-BE49-F238E27FC236}">
-                <a16:creationId xmlns:a16="http://schemas.microsoft.com/office/drawing/2014/main" id="{C72E1AFE-BE83-4B2B-8B5D-4BD4669DF402}"/>
+                <a16:creationId xmlns:a16="http://schemas.microsoft.com/office/drawing/2014/main" id="{9761DC02-3024-44A9-9C63-B506286602D8}"/>
               </a:ext>
             </a:extLst>
           </p:cNvPr>
@@ -3616,7 +3616,7 @@
           <p:cNvPr id="8" name="">
             <a:extLst xmlns:a="http://schemas.openxmlformats.org/drawingml/2006/main">
               <a:ext uri="{FF2B5EF4-FFF2-40B4-BE49-F238E27FC236}">
-                <a16:creationId xmlns:a16="http://schemas.microsoft.com/office/drawing/2014/main" id="{67B403D0-DE45-47B6-B430-DEA3B9BD9893}"/>
+                <a16:creationId xmlns:a16="http://schemas.microsoft.com/office/drawing/2014/main" id="{0FD46E1A-255B-4340-8F31-9E76AF055409}"/>
               </a:ext>
             </a:extLst>
           </p:cNvPr>
@@ -3673,7 +3673,7 @@
           <p:cNvPr id="9" name="">
             <a:extLst xmlns:a="http://schemas.openxmlformats.org/drawingml/2006/main">
               <a:ext uri="{FF2B5EF4-FFF2-40B4-BE49-F238E27FC236}">
-                <a16:creationId xmlns:a16="http://schemas.microsoft.com/office/drawing/2014/main" id="{48DC3D04-6AEE-4750-838A-F1903E2E448F}"/>
+                <a16:creationId xmlns:a16="http://schemas.microsoft.com/office/drawing/2014/main" id="{10309809-F0B9-4E06-8BAC-69D05425C514}"/>
               </a:ext>
             </a:extLst>
           </p:cNvPr>
@@ -3730,7 +3730,7 @@
           <p:cNvPr id="10" name="">
             <a:extLst xmlns:a="http://schemas.openxmlformats.org/drawingml/2006/main">
               <a:ext uri="{FF2B5EF4-FFF2-40B4-BE49-F238E27FC236}">
-                <a16:creationId xmlns:a16="http://schemas.microsoft.com/office/drawing/2014/main" id="{104F323B-FB0D-475E-85FF-BF1DA3A942A7}"/>
+                <a16:creationId xmlns:a16="http://schemas.microsoft.com/office/drawing/2014/main" id="{1C79CF1D-AF54-4CD9-8722-3236D67AC7D0}"/>
               </a:ext>
             </a:extLst>
           </p:cNvPr>
@@ -3787,7 +3787,7 @@
           <p:cNvPr id="11" name="">
             <a:extLst xmlns:a="http://schemas.openxmlformats.org/drawingml/2006/main">
               <a:ext uri="{FF2B5EF4-FFF2-40B4-BE49-F238E27FC236}">
-                <a16:creationId xmlns:a16="http://schemas.microsoft.com/office/drawing/2014/main" id="{ACDA5694-C312-4BC3-A0B1-D0AE3EE68999}"/>
+                <a16:creationId xmlns:a16="http://schemas.microsoft.com/office/drawing/2014/main" id="{1BFE9510-CA26-450D-B24E-EFBCE96781B5}"/>
               </a:ext>
             </a:extLst>
           </p:cNvPr>
@@ -3821,7 +3821,7 @@
           <p:cNvPr id="12" name="">
             <a:extLst xmlns:a="http://schemas.openxmlformats.org/drawingml/2006/main">
               <a:ext uri="{FF2B5EF4-FFF2-40B4-BE49-F238E27FC236}">
-                <a16:creationId xmlns:a16="http://schemas.microsoft.com/office/drawing/2014/main" id="{EA71C376-9DE6-4F25-8466-CA5B9A8CF679}"/>
+                <a16:creationId xmlns:a16="http://schemas.microsoft.com/office/drawing/2014/main" id="{F6991A81-B06B-4FF7-9093-A7527E29506E}"/>
               </a:ext>
             </a:extLst>
           </p:cNvPr>
@@ -3878,7 +3878,7 @@
           <p:cNvPr id="13" name="">
             <a:extLst xmlns:a="http://schemas.openxmlformats.org/drawingml/2006/main">
               <a:ext uri="{FF2B5EF4-FFF2-40B4-BE49-F238E27FC236}">
-                <a16:creationId xmlns:a16="http://schemas.microsoft.com/office/drawing/2014/main" id="{22585B18-E498-4327-ABC4-E8FFC7D2504F}"/>
+                <a16:creationId xmlns:a16="http://schemas.microsoft.com/office/drawing/2014/main" id="{DBBA966A-A16F-4A18-AF43-3EF2B02B78BD}"/>
               </a:ext>
             </a:extLst>
           </p:cNvPr>
@@ -3935,7 +3935,7 @@
           <p:cNvPr id="14" name="">
             <a:extLst xmlns:a="http://schemas.openxmlformats.org/drawingml/2006/main">
               <a:ext uri="{FF2B5EF4-FFF2-40B4-BE49-F238E27FC236}">
-                <a16:creationId xmlns:a16="http://schemas.microsoft.com/office/drawing/2014/main" id="{9BE3FBD1-4BFF-4F28-AFAE-11EC007CD0F1}"/>
+                <a16:creationId xmlns:a16="http://schemas.microsoft.com/office/drawing/2014/main" id="{8856B9D2-F478-482A-9E14-480535D1EC61}"/>
               </a:ext>
             </a:extLst>
           </p:cNvPr>
@@ -3992,7 +3992,7 @@
           <p:cNvPr id="15" name="">
             <a:extLst xmlns:a="http://schemas.openxmlformats.org/drawingml/2006/main">
               <a:ext uri="{FF2B5EF4-FFF2-40B4-BE49-F238E27FC236}">
-                <a16:creationId xmlns:a16="http://schemas.microsoft.com/office/drawing/2014/main" id="{DDB1DBDB-3CF6-4871-982A-01A271289AB6}"/>
+                <a16:creationId xmlns:a16="http://schemas.microsoft.com/office/drawing/2014/main" id="{7784743F-9261-4FFE-8B75-BB17C7744A23}"/>
               </a:ext>
             </a:extLst>
           </p:cNvPr>
@@ -4026,7 +4026,7 @@
           <p:cNvPr id="16" name="">
             <a:extLst xmlns:a="http://schemas.openxmlformats.org/drawingml/2006/main">
               <a:ext uri="{FF2B5EF4-FFF2-40B4-BE49-F238E27FC236}">
-                <a16:creationId xmlns:a16="http://schemas.microsoft.com/office/drawing/2014/main" id="{0B8AD4ED-6361-4E1D-91C7-04D98A40BEB6}"/>
+                <a16:creationId xmlns:a16="http://schemas.microsoft.com/office/drawing/2014/main" id="{9FD47E0E-7118-48F9-A06A-9C6C75422560}"/>
               </a:ext>
             </a:extLst>
           </p:cNvPr>
@@ -4083,7 +4083,7 @@
           <p:cNvPr id="17" name="">
             <a:extLst xmlns:a="http://schemas.openxmlformats.org/drawingml/2006/main">
               <a:ext uri="{FF2B5EF4-FFF2-40B4-BE49-F238E27FC236}">
-                <a16:creationId xmlns:a16="http://schemas.microsoft.com/office/drawing/2014/main" id="{26F3F397-B883-4EA8-9DD3-3324589822AB}"/>
+                <a16:creationId xmlns:a16="http://schemas.microsoft.com/office/drawing/2014/main" id="{A2965CD4-B9D3-4002-A0CB-1F0CA84984BD}"/>
               </a:ext>
             </a:extLst>
           </p:cNvPr>
@@ -4140,7 +4140,7 @@
           <p:cNvPr id="18" name="">
             <a:extLst xmlns:a="http://schemas.openxmlformats.org/drawingml/2006/main">
               <a:ext uri="{FF2B5EF4-FFF2-40B4-BE49-F238E27FC236}">
-                <a16:creationId xmlns:a16="http://schemas.microsoft.com/office/drawing/2014/main" id="{B071A026-88AC-49D2-AB5C-3855C8549A42}"/>
+                <a16:creationId xmlns:a16="http://schemas.microsoft.com/office/drawing/2014/main" id="{2D937D42-AB04-4496-A54B-449D9569C0D0}"/>
               </a:ext>
             </a:extLst>
           </p:cNvPr>
@@ -4195,7 +4195,7 @@
     </p:spTree>
     <p:extLst>
       <p:ext uri="{BB962C8B-B14F-4D97-AF65-F5344CB8AC3E}">
-        <p14:creationId xmlns:p14="http://schemas.microsoft.com/office/powerpoint/2010/main" val="847020616"/>
+        <p14:creationId xmlns:p14="http://schemas.microsoft.com/office/powerpoint/2010/main" val="669202175"/>
       </p:ext>
     </p:extLst>
   </p:cSld>
@@ -4350,7 +4350,7 @@
           <p:cNvPr id="23" name="">
             <a:extLst xmlns:a="http://schemas.openxmlformats.org/drawingml/2006/main">
               <a:ext uri="{FF2B5EF4-FFF2-40B4-BE49-F238E27FC236}">
-                <a16:creationId xmlns:a16="http://schemas.microsoft.com/office/drawing/2014/main" id="{7C0494B9-AF40-4FAC-ABFD-4D3DE56013EA}"/>
+                <a16:creationId xmlns:a16="http://schemas.microsoft.com/office/drawing/2014/main" id="{0158ADC4-EA47-446A-B4AC-F1528722993C}"/>
               </a:ext>
             </a:extLst>
           </p:cNvPr>
@@ -4382,7 +4382,7 @@
           <p:cNvPr id="2" name="">
             <a:extLst xmlns:a="http://schemas.openxmlformats.org/drawingml/2006/main">
               <a:ext uri="{FF2B5EF4-FFF2-40B4-BE49-F238E27FC236}">
-                <a16:creationId xmlns:a16="http://schemas.microsoft.com/office/drawing/2014/main" id="{F63C1CAC-FF1E-4395-98DC-E61CC6B641E2}"/>
+                <a16:creationId xmlns:a16="http://schemas.microsoft.com/office/drawing/2014/main" id="{ED90C58A-01DF-4D47-98DE-73F56C9DE9F5}"/>
               </a:ext>
             </a:extLst>
           </p:cNvPr>
@@ -4439,7 +4439,7 @@
           <p:cNvPr id="3" name="">
             <a:extLst xmlns:a="http://schemas.openxmlformats.org/drawingml/2006/main">
               <a:ext uri="{FF2B5EF4-FFF2-40B4-BE49-F238E27FC236}">
-                <a16:creationId xmlns:a16="http://schemas.microsoft.com/office/drawing/2014/main" id="{AEDC22D5-906D-4747-B530-B7B30E5D51CA}"/>
+                <a16:creationId xmlns:a16="http://schemas.microsoft.com/office/drawing/2014/main" id="{20D72448-2E20-4DE4-89A4-A38131278A8E}"/>
               </a:ext>
             </a:extLst>
           </p:cNvPr>
@@ -4471,7 +4471,7 @@
           <p:cNvPr id="4" name="">
             <a:extLst xmlns:a="http://schemas.openxmlformats.org/drawingml/2006/main">
               <a:ext uri="{FF2B5EF4-FFF2-40B4-BE49-F238E27FC236}">
-                <a16:creationId xmlns:a16="http://schemas.microsoft.com/office/drawing/2014/main" id="{13DB4EE9-6927-44DF-A90B-716E2815581B}"/>
+                <a16:creationId xmlns:a16="http://schemas.microsoft.com/office/drawing/2014/main" id="{7D312DBC-6807-48F1-A64A-2E09CA260FD0}"/>
               </a:ext>
             </a:extLst>
           </p:cNvPr>
@@ -4528,7 +4528,7 @@
           <p:cNvPr id="5" name="">
             <a:extLst xmlns:a="http://schemas.openxmlformats.org/drawingml/2006/main">
               <a:ext uri="{FF2B5EF4-FFF2-40B4-BE49-F238E27FC236}">
-                <a16:creationId xmlns:a16="http://schemas.microsoft.com/office/drawing/2014/main" id="{2C82D2C9-AD88-44B3-9D3A-9A3314F1C79C}"/>
+                <a16:creationId xmlns:a16="http://schemas.microsoft.com/office/drawing/2014/main" id="{EB81786A-FF19-4CDF-ADB2-69E206E8C24E}"/>
               </a:ext>
             </a:extLst>
           </p:cNvPr>
@@ -4585,7 +4585,7 @@
           <p:cNvPr id="6" name="">
             <a:extLst xmlns:a="http://schemas.openxmlformats.org/drawingml/2006/main">
               <a:ext uri="{FF2B5EF4-FFF2-40B4-BE49-F238E27FC236}">
-                <a16:creationId xmlns:a16="http://schemas.microsoft.com/office/drawing/2014/main" id="{B1FB435E-9C81-4ACD-971B-5D6228CA7357}"/>
+                <a16:creationId xmlns:a16="http://schemas.microsoft.com/office/drawing/2014/main" id="{45FBDB8A-A61C-4A9B-A435-FF068451A065}"/>
               </a:ext>
             </a:extLst>
           </p:cNvPr>
@@ -4642,7 +4642,7 @@
           <p:cNvPr id="7" name="">
             <a:extLst xmlns:a="http://schemas.openxmlformats.org/drawingml/2006/main">
               <a:ext uri="{FF2B5EF4-FFF2-40B4-BE49-F238E27FC236}">
-                <a16:creationId xmlns:a16="http://schemas.microsoft.com/office/drawing/2014/main" id="{C2A9C394-73B6-49A6-83A0-C45A2FD05EA0}"/>
+                <a16:creationId xmlns:a16="http://schemas.microsoft.com/office/drawing/2014/main" id="{5638DE4E-540F-43B4-8AA2-AD6020BE6CE3}"/>
               </a:ext>
             </a:extLst>
           </p:cNvPr>
@@ -4674,7 +4674,7 @@
           <p:cNvPr id="8" name="">
             <a:extLst xmlns:a="http://schemas.openxmlformats.org/drawingml/2006/main">
               <a:ext uri="{FF2B5EF4-FFF2-40B4-BE49-F238E27FC236}">
-                <a16:creationId xmlns:a16="http://schemas.microsoft.com/office/drawing/2014/main" id="{790A2F51-9B4C-4E53-BBE2-5291EACB3368}"/>
+                <a16:creationId xmlns:a16="http://schemas.microsoft.com/office/drawing/2014/main" id="{F9241D66-93D5-4FD3-8922-BF8FC0848404}"/>
               </a:ext>
             </a:extLst>
           </p:cNvPr>
@@ -4731,7 +4731,7 @@
           <p:cNvPr id="9" name="">
             <a:extLst xmlns:a="http://schemas.openxmlformats.org/drawingml/2006/main">
               <a:ext uri="{FF2B5EF4-FFF2-40B4-BE49-F238E27FC236}">
-                <a16:creationId xmlns:a16="http://schemas.microsoft.com/office/drawing/2014/main" id="{75EB4774-7961-4004-BF74-E3C7EDC55BE0}"/>
+                <a16:creationId xmlns:a16="http://schemas.microsoft.com/office/drawing/2014/main" id="{ED384FA4-626D-4F90-92A8-A702126604E1}"/>
               </a:ext>
             </a:extLst>
           </p:cNvPr>
@@ -4788,7 +4788,7 @@
           <p:cNvPr id="10" name="">
             <a:extLst xmlns:a="http://schemas.openxmlformats.org/drawingml/2006/main">
               <a:ext uri="{FF2B5EF4-FFF2-40B4-BE49-F238E27FC236}">
-                <a16:creationId xmlns:a16="http://schemas.microsoft.com/office/drawing/2014/main" id="{EE2914B1-118F-4BE0-8B70-EDE5C4EC0082}"/>
+                <a16:creationId xmlns:a16="http://schemas.microsoft.com/office/drawing/2014/main" id="{06FED277-BFE6-4EF5-B52E-D2418575343A}"/>
               </a:ext>
             </a:extLst>
           </p:cNvPr>
@@ -4822,7 +4822,7 @@
           <p:cNvPr id="11" name="">
             <a:extLst xmlns:a="http://schemas.openxmlformats.org/drawingml/2006/main">
               <a:ext uri="{FF2B5EF4-FFF2-40B4-BE49-F238E27FC236}">
-                <a16:creationId xmlns:a16="http://schemas.microsoft.com/office/drawing/2014/main" id="{9778E22A-6427-4FEA-84DC-30E4E63B6364}"/>
+                <a16:creationId xmlns:a16="http://schemas.microsoft.com/office/drawing/2014/main" id="{ED8C4C48-D43B-45AC-A915-4899DBF2FFFD}"/>
               </a:ext>
             </a:extLst>
           </p:cNvPr>
@@ -4854,7 +4854,7 @@
           <p:cNvPr id="12" name="">
             <a:extLst xmlns:a="http://schemas.openxmlformats.org/drawingml/2006/main">
               <a:ext uri="{FF2B5EF4-FFF2-40B4-BE49-F238E27FC236}">
-                <a16:creationId xmlns:a16="http://schemas.microsoft.com/office/drawing/2014/main" id="{9090D6A9-EB34-4ADA-9411-7C25E2BEBEE1}"/>
+                <a16:creationId xmlns:a16="http://schemas.microsoft.com/office/drawing/2014/main" id="{A3DE1FAF-B123-4F73-8CD9-E60C793ECA9E}"/>
               </a:ext>
             </a:extLst>
           </p:cNvPr>
@@ -4911,7 +4911,7 @@
           <p:cNvPr id="13" name="">
             <a:extLst xmlns:a="http://schemas.openxmlformats.org/drawingml/2006/main">
               <a:ext uri="{FF2B5EF4-FFF2-40B4-BE49-F238E27FC236}">
-                <a16:creationId xmlns:a16="http://schemas.microsoft.com/office/drawing/2014/main" id="{54185DAE-6F69-4C52-9313-48490A6B2FA9}"/>
+                <a16:creationId xmlns:a16="http://schemas.microsoft.com/office/drawing/2014/main" id="{3C2BC83A-5080-471B-906E-C415921A0D60}"/>
               </a:ext>
             </a:extLst>
           </p:cNvPr>
@@ -4968,7 +4968,7 @@
           <p:cNvPr id="14" name="">
             <a:extLst xmlns:a="http://schemas.openxmlformats.org/drawingml/2006/main">
               <a:ext uri="{FF2B5EF4-FFF2-40B4-BE49-F238E27FC236}">
-                <a16:creationId xmlns:a16="http://schemas.microsoft.com/office/drawing/2014/main" id="{2C7D9B1D-4521-4DD2-9E90-07EA756C9DAD}"/>
+                <a16:creationId xmlns:a16="http://schemas.microsoft.com/office/drawing/2014/main" id="{52044F38-8BD7-46C8-8725-33C168E462B1}"/>
               </a:ext>
             </a:extLst>
           </p:cNvPr>
@@ -5002,7 +5002,7 @@
           <p:cNvPr id="15" name="">
             <a:extLst xmlns:a="http://schemas.openxmlformats.org/drawingml/2006/main">
               <a:ext uri="{FF2B5EF4-FFF2-40B4-BE49-F238E27FC236}">
-                <a16:creationId xmlns:a16="http://schemas.microsoft.com/office/drawing/2014/main" id="{FC883CD7-6255-4AA8-8725-C02B0CD0E82E}"/>
+                <a16:creationId xmlns:a16="http://schemas.microsoft.com/office/drawing/2014/main" id="{C26BB09D-F9DD-4F78-9AE4-A98B44B0ECC7}"/>
               </a:ext>
             </a:extLst>
           </p:cNvPr>
@@ -5034,7 +5034,7 @@
           <p:cNvPr id="16" name="">
             <a:extLst xmlns:a="http://schemas.openxmlformats.org/drawingml/2006/main">
               <a:ext uri="{FF2B5EF4-FFF2-40B4-BE49-F238E27FC236}">
-                <a16:creationId xmlns:a16="http://schemas.microsoft.com/office/drawing/2014/main" id="{8D5DDB95-62D6-424C-828F-8B262A453F55}"/>
+                <a16:creationId xmlns:a16="http://schemas.microsoft.com/office/drawing/2014/main" id="{7E09A19A-1BBC-4EA9-9FB1-D82409EADA7C}"/>
               </a:ext>
             </a:extLst>
           </p:cNvPr>
@@ -5091,7 +5091,7 @@
           <p:cNvPr id="17" name="">
             <a:extLst xmlns:a="http://schemas.openxmlformats.org/drawingml/2006/main">
               <a:ext uri="{FF2B5EF4-FFF2-40B4-BE49-F238E27FC236}">
-                <a16:creationId xmlns:a16="http://schemas.microsoft.com/office/drawing/2014/main" id="{59790FD4-A32C-4D17-AFAB-2E87D97B1149}"/>
+                <a16:creationId xmlns:a16="http://schemas.microsoft.com/office/drawing/2014/main" id="{1607DF76-D2B7-4CDF-95BF-686867B52572}"/>
               </a:ext>
             </a:extLst>
           </p:cNvPr>
@@ -5148,7 +5148,7 @@
           <p:cNvPr id="18" name="">
             <a:extLst xmlns:a="http://schemas.openxmlformats.org/drawingml/2006/main">
               <a:ext uri="{FF2B5EF4-FFF2-40B4-BE49-F238E27FC236}">
-                <a16:creationId xmlns:a16="http://schemas.microsoft.com/office/drawing/2014/main" id="{50350ACB-2691-4DAA-9626-8A15C410CE34}"/>
+                <a16:creationId xmlns:a16="http://schemas.microsoft.com/office/drawing/2014/main" id="{819D967E-C046-4197-B5A7-E0456BD04DE2}"/>
               </a:ext>
             </a:extLst>
           </p:cNvPr>
@@ -5182,7 +5182,7 @@
           <p:cNvPr id="19" name="">
             <a:extLst xmlns:a="http://schemas.openxmlformats.org/drawingml/2006/main">
               <a:ext uri="{FF2B5EF4-FFF2-40B4-BE49-F238E27FC236}">
-                <a16:creationId xmlns:a16="http://schemas.microsoft.com/office/drawing/2014/main" id="{E7F5D8F2-7A01-425E-B587-B9C35995376B}"/>
+                <a16:creationId xmlns:a16="http://schemas.microsoft.com/office/drawing/2014/main" id="{B674D157-BBC7-4550-A7CF-95B03DFA9D63}"/>
               </a:ext>
             </a:extLst>
           </p:cNvPr>
@@ -5214,7 +5214,7 @@
           <p:cNvPr id="20" name="">
             <a:extLst xmlns:a="http://schemas.openxmlformats.org/drawingml/2006/main">
               <a:ext uri="{FF2B5EF4-FFF2-40B4-BE49-F238E27FC236}">
-                <a16:creationId xmlns:a16="http://schemas.microsoft.com/office/drawing/2014/main" id="{0DD6100C-AA11-459B-8A20-9C2654E20B57}"/>
+                <a16:creationId xmlns:a16="http://schemas.microsoft.com/office/drawing/2014/main" id="{D6B2A65F-D739-43F8-B5E2-4291DE2F2003}"/>
               </a:ext>
             </a:extLst>
           </p:cNvPr>
@@ -5271,7 +5271,7 @@
           <p:cNvPr id="21" name="">
             <a:extLst xmlns:a="http://schemas.openxmlformats.org/drawingml/2006/main">
               <a:ext uri="{FF2B5EF4-FFF2-40B4-BE49-F238E27FC236}">
-                <a16:creationId xmlns:a16="http://schemas.microsoft.com/office/drawing/2014/main" id="{78DB9F0A-2E87-4E37-BC37-455BB8605DCD}"/>
+                <a16:creationId xmlns:a16="http://schemas.microsoft.com/office/drawing/2014/main" id="{E18F0839-045A-4EF8-94A0-F9E9DD3B4570}"/>
               </a:ext>
             </a:extLst>
           </p:cNvPr>
@@ -5328,7 +5328,7 @@
           <p:cNvPr id="22" name="">
             <a:extLst xmlns:a="http://schemas.openxmlformats.org/drawingml/2006/main">
               <a:ext uri="{FF2B5EF4-FFF2-40B4-BE49-F238E27FC236}">
-                <a16:creationId xmlns:a16="http://schemas.microsoft.com/office/drawing/2014/main" id="{E98909C1-9FE5-4111-813D-A6B75B7F9067}"/>
+                <a16:creationId xmlns:a16="http://schemas.microsoft.com/office/drawing/2014/main" id="{734F9E28-AE8C-41AD-813E-4F3496772A44}"/>
               </a:ext>
             </a:extLst>
           </p:cNvPr>
@@ -5383,7 +5383,7 @@
     </p:spTree>
     <p:extLst>
       <p:ext uri="{BB962C8B-B14F-4D97-AF65-F5344CB8AC3E}">
-        <p14:creationId xmlns:p14="http://schemas.microsoft.com/office/powerpoint/2010/main" val="703422998"/>
+        <p14:creationId xmlns:p14="http://schemas.microsoft.com/office/powerpoint/2010/main" val="716940834"/>
       </p:ext>
     </p:extLst>
   </p:cSld>
@@ -5584,7 +5584,7 @@
           <p:cNvPr id="23" name="">
             <a:extLst xmlns:a="http://schemas.openxmlformats.org/drawingml/2006/main">
               <a:ext uri="{FF2B5EF4-FFF2-40B4-BE49-F238E27FC236}">
-                <a16:creationId xmlns:a16="http://schemas.microsoft.com/office/drawing/2014/main" id="{1E8B8301-D573-4F00-AA9F-6391901F782E}"/>
+                <a16:creationId xmlns:a16="http://schemas.microsoft.com/office/drawing/2014/main" id="{E0956424-2791-4CBA-93C7-222AC8DFE22E}"/>
               </a:ext>
             </a:extLst>
           </p:cNvPr>
@@ -5616,7 +5616,7 @@
           <p:cNvPr id="2" name="">
             <a:extLst xmlns:a="http://schemas.openxmlformats.org/drawingml/2006/main">
               <a:ext uri="{FF2B5EF4-FFF2-40B4-BE49-F238E27FC236}">
-                <a16:creationId xmlns:a16="http://schemas.microsoft.com/office/drawing/2014/main" id="{6772D5BA-C855-4970-8DA8-CFA4D1C17537}"/>
+                <a16:creationId xmlns:a16="http://schemas.microsoft.com/office/drawing/2014/main" id="{45493258-083E-4326-963C-8EDE752C4A8B}"/>
               </a:ext>
             </a:extLst>
           </p:cNvPr>
@@ -5673,7 +5673,7 @@
           <p:cNvPr id="3" name="">
             <a:extLst xmlns:a="http://schemas.openxmlformats.org/drawingml/2006/main">
               <a:ext uri="{FF2B5EF4-FFF2-40B4-BE49-F238E27FC236}">
-                <a16:creationId xmlns:a16="http://schemas.microsoft.com/office/drawing/2014/main" id="{2540406B-0DC2-42B7-B852-985BD754292E}"/>
+                <a16:creationId xmlns:a16="http://schemas.microsoft.com/office/drawing/2014/main" id="{B266B824-BF58-4CF2-9253-FFFF7D345617}"/>
               </a:ext>
             </a:extLst>
           </p:cNvPr>
@@ -5705,7 +5705,7 @@
           <p:cNvPr id="4" name="">
             <a:extLst xmlns:a="http://schemas.openxmlformats.org/drawingml/2006/main">
               <a:ext uri="{FF2B5EF4-FFF2-40B4-BE49-F238E27FC236}">
-                <a16:creationId xmlns:a16="http://schemas.microsoft.com/office/drawing/2014/main" id="{92182D45-F3EA-4B36-B504-F177BF16A1B1}"/>
+                <a16:creationId xmlns:a16="http://schemas.microsoft.com/office/drawing/2014/main" id="{76CB11F1-6506-4696-AC24-9AD73CB90740}"/>
               </a:ext>
             </a:extLst>
           </p:cNvPr>
@@ -5762,7 +5762,7 @@
           <p:cNvPr id="5" name="">
             <a:extLst xmlns:a="http://schemas.openxmlformats.org/drawingml/2006/main">
               <a:ext uri="{FF2B5EF4-FFF2-40B4-BE49-F238E27FC236}">
-                <a16:creationId xmlns:a16="http://schemas.microsoft.com/office/drawing/2014/main" id="{4800001A-3FB6-4A11-A345-A6FA43BD9368}"/>
+                <a16:creationId xmlns:a16="http://schemas.microsoft.com/office/drawing/2014/main" id="{3F1B7E15-618F-4E80-8A9A-1EC4AE41E57A}"/>
               </a:ext>
             </a:extLst>
           </p:cNvPr>
@@ -5819,7 +5819,7 @@
           <p:cNvPr id="6" name="">
             <a:extLst xmlns:a="http://schemas.openxmlformats.org/drawingml/2006/main">
               <a:ext uri="{FF2B5EF4-FFF2-40B4-BE49-F238E27FC236}">
-                <a16:creationId xmlns:a16="http://schemas.microsoft.com/office/drawing/2014/main" id="{18CE6D21-CCE8-47C4-8E29-D61738CF98CF}"/>
+                <a16:creationId xmlns:a16="http://schemas.microsoft.com/office/drawing/2014/main" id="{AD2649C0-217A-4FEA-B801-34C69ADF23B4}"/>
               </a:ext>
             </a:extLst>
           </p:cNvPr>
@@ -5876,7 +5876,7 @@
           <p:cNvPr id="7" name="">
             <a:extLst xmlns:a="http://schemas.openxmlformats.org/drawingml/2006/main">
               <a:ext uri="{FF2B5EF4-FFF2-40B4-BE49-F238E27FC236}">
-                <a16:creationId xmlns:a16="http://schemas.microsoft.com/office/drawing/2014/main" id="{33733943-E444-45C6-8B89-6D9B6A71B884}"/>
+                <a16:creationId xmlns:a16="http://schemas.microsoft.com/office/drawing/2014/main" id="{257B088C-0DFD-444E-90A5-3153B89A9102}"/>
               </a:ext>
             </a:extLst>
           </p:cNvPr>
@@ -5908,7 +5908,7 @@
           <p:cNvPr id="8" name="">
             <a:extLst xmlns:a="http://schemas.openxmlformats.org/drawingml/2006/main">
               <a:ext uri="{FF2B5EF4-FFF2-40B4-BE49-F238E27FC236}">
-                <a16:creationId xmlns:a16="http://schemas.microsoft.com/office/drawing/2014/main" id="{DA54A158-CD1B-4342-A21D-3AF1C314AC86}"/>
+                <a16:creationId xmlns:a16="http://schemas.microsoft.com/office/drawing/2014/main" id="{91060B4F-5A0D-45D1-8D74-CF757B91C4EC}"/>
               </a:ext>
             </a:extLst>
           </p:cNvPr>
@@ -5965,7 +5965,7 @@
           <p:cNvPr id="9" name="">
             <a:extLst xmlns:a="http://schemas.openxmlformats.org/drawingml/2006/main">
               <a:ext uri="{FF2B5EF4-FFF2-40B4-BE49-F238E27FC236}">
-                <a16:creationId xmlns:a16="http://schemas.microsoft.com/office/drawing/2014/main" id="{CE4FB081-B169-41CE-A1CF-AE14667981CE}"/>
+                <a16:creationId xmlns:a16="http://schemas.microsoft.com/office/drawing/2014/main" id="{F1FC08A4-6F66-4CFB-82A1-112ED774A45A}"/>
               </a:ext>
             </a:extLst>
           </p:cNvPr>
@@ -6022,7 +6022,7 @@
           <p:cNvPr id="10" name="">
             <a:extLst xmlns:a="http://schemas.openxmlformats.org/drawingml/2006/main">
               <a:ext uri="{FF2B5EF4-FFF2-40B4-BE49-F238E27FC236}">
-                <a16:creationId xmlns:a16="http://schemas.microsoft.com/office/drawing/2014/main" id="{4A429BAA-FC86-47AB-9D7E-02E21F10742D}"/>
+                <a16:creationId xmlns:a16="http://schemas.microsoft.com/office/drawing/2014/main" id="{CC9D8062-2D95-45F9-B207-5AF8CF47909A}"/>
               </a:ext>
             </a:extLst>
           </p:cNvPr>
@@ -6056,7 +6056,7 @@
           <p:cNvPr id="11" name="">
             <a:extLst xmlns:a="http://schemas.openxmlformats.org/drawingml/2006/main">
               <a:ext uri="{FF2B5EF4-FFF2-40B4-BE49-F238E27FC236}">
-                <a16:creationId xmlns:a16="http://schemas.microsoft.com/office/drawing/2014/main" id="{022791F8-53D0-4B3B-BB07-A5B190F60599}"/>
+                <a16:creationId xmlns:a16="http://schemas.microsoft.com/office/drawing/2014/main" id="{F516D9DE-8E1A-44F1-B67F-3BD9E1B161DD}"/>
               </a:ext>
             </a:extLst>
           </p:cNvPr>
@@ -6088,7 +6088,7 @@
           <p:cNvPr id="12" name="">
             <a:extLst xmlns:a="http://schemas.openxmlformats.org/drawingml/2006/main">
               <a:ext uri="{FF2B5EF4-FFF2-40B4-BE49-F238E27FC236}">
-                <a16:creationId xmlns:a16="http://schemas.microsoft.com/office/drawing/2014/main" id="{DA5B8E29-0BB0-4E0E-85F1-681217847C6B}"/>
+                <a16:creationId xmlns:a16="http://schemas.microsoft.com/office/drawing/2014/main" id="{0822D82C-9D1D-4DCC-9398-1270269DD790}"/>
               </a:ext>
             </a:extLst>
           </p:cNvPr>
@@ -6145,7 +6145,7 @@
           <p:cNvPr id="13" name="">
             <a:extLst xmlns:a="http://schemas.openxmlformats.org/drawingml/2006/main">
               <a:ext uri="{FF2B5EF4-FFF2-40B4-BE49-F238E27FC236}">
-                <a16:creationId xmlns:a16="http://schemas.microsoft.com/office/drawing/2014/main" id="{F6DEC2BC-A673-4743-9CF0-7B8C79FE3782}"/>
+                <a16:creationId xmlns:a16="http://schemas.microsoft.com/office/drawing/2014/main" id="{C949584C-0BA3-453A-A30F-CFDA76C81A0D}"/>
               </a:ext>
             </a:extLst>
           </p:cNvPr>
@@ -6202,7 +6202,7 @@
           <p:cNvPr id="14" name="">
             <a:extLst xmlns:a="http://schemas.openxmlformats.org/drawingml/2006/main">
               <a:ext uri="{FF2B5EF4-FFF2-40B4-BE49-F238E27FC236}">
-                <a16:creationId xmlns:a16="http://schemas.microsoft.com/office/drawing/2014/main" id="{0C0D2B48-CC60-4508-AE56-E98D8235F3E5}"/>
+                <a16:creationId xmlns:a16="http://schemas.microsoft.com/office/drawing/2014/main" id="{A7BC9792-486F-427F-A36B-C2131D1B2081}"/>
               </a:ext>
             </a:extLst>
           </p:cNvPr>
@@ -6236,7 +6236,7 @@
           <p:cNvPr id="15" name="">
             <a:extLst xmlns:a="http://schemas.openxmlformats.org/drawingml/2006/main">
               <a:ext uri="{FF2B5EF4-FFF2-40B4-BE49-F238E27FC236}">
-                <a16:creationId xmlns:a16="http://schemas.microsoft.com/office/drawing/2014/main" id="{C406343A-6D52-4DBF-9761-99021BE62228}"/>
+                <a16:creationId xmlns:a16="http://schemas.microsoft.com/office/drawing/2014/main" id="{395AF173-265F-4A36-8956-59F2EB6C49F3}"/>
               </a:ext>
             </a:extLst>
           </p:cNvPr>
@@ -6268,7 +6268,7 @@
           <p:cNvPr id="16" name="">
             <a:extLst xmlns:a="http://schemas.openxmlformats.org/drawingml/2006/main">
               <a:ext uri="{FF2B5EF4-FFF2-40B4-BE49-F238E27FC236}">
-                <a16:creationId xmlns:a16="http://schemas.microsoft.com/office/drawing/2014/main" id="{A14E53F3-F056-47D2-8A11-E2B81ADA398B}"/>
+                <a16:creationId xmlns:a16="http://schemas.microsoft.com/office/drawing/2014/main" id="{16A81CA4-DF63-427E-8ECB-CF4656BEB08E}"/>
               </a:ext>
             </a:extLst>
           </p:cNvPr>
@@ -6325,7 +6325,7 @@
           <p:cNvPr id="17" name="">
             <a:extLst xmlns:a="http://schemas.openxmlformats.org/drawingml/2006/main">
               <a:ext uri="{FF2B5EF4-FFF2-40B4-BE49-F238E27FC236}">
-                <a16:creationId xmlns:a16="http://schemas.microsoft.com/office/drawing/2014/main" id="{51677658-FB8C-415A-88C8-A3383A50D450}"/>
+                <a16:creationId xmlns:a16="http://schemas.microsoft.com/office/drawing/2014/main" id="{6CE9E844-B492-439C-A9D8-F9B21091C8BF}"/>
               </a:ext>
             </a:extLst>
           </p:cNvPr>
@@ -6382,7 +6382,7 @@
           <p:cNvPr id="18" name="">
             <a:extLst xmlns:a="http://schemas.openxmlformats.org/drawingml/2006/main">
               <a:ext uri="{FF2B5EF4-FFF2-40B4-BE49-F238E27FC236}">
-                <a16:creationId xmlns:a16="http://schemas.microsoft.com/office/drawing/2014/main" id="{FD397C8C-C637-40FE-BBFB-46056A9F480E}"/>
+                <a16:creationId xmlns:a16="http://schemas.microsoft.com/office/drawing/2014/main" id="{8BBB92DF-1285-4A56-B9C7-AF4261C96B38}"/>
               </a:ext>
             </a:extLst>
           </p:cNvPr>
@@ -6416,7 +6416,7 @@
           <p:cNvPr id="19" name="">
             <a:extLst xmlns:a="http://schemas.openxmlformats.org/drawingml/2006/main">
               <a:ext uri="{FF2B5EF4-FFF2-40B4-BE49-F238E27FC236}">
-                <a16:creationId xmlns:a16="http://schemas.microsoft.com/office/drawing/2014/main" id="{5709B2E4-4083-47CC-A0E6-807D5CFAF9D9}"/>
+                <a16:creationId xmlns:a16="http://schemas.microsoft.com/office/drawing/2014/main" id="{8D27C0D7-D2C5-46ED-BAA5-EDA9B4A07EB1}"/>
               </a:ext>
             </a:extLst>
           </p:cNvPr>
@@ -6448,7 +6448,7 @@
           <p:cNvPr id="20" name="">
             <a:extLst xmlns:a="http://schemas.openxmlformats.org/drawingml/2006/main">
               <a:ext uri="{FF2B5EF4-FFF2-40B4-BE49-F238E27FC236}">
-                <a16:creationId xmlns:a16="http://schemas.microsoft.com/office/drawing/2014/main" id="{8F4EFE3C-C9B5-4EE2-BF14-88C2539F0CFD}"/>
+                <a16:creationId xmlns:a16="http://schemas.microsoft.com/office/drawing/2014/main" id="{C2AFD1A2-1752-4C51-9753-59F603A5ADB8}"/>
               </a:ext>
             </a:extLst>
           </p:cNvPr>
@@ -6505,7 +6505,7 @@
           <p:cNvPr id="21" name="">
             <a:extLst xmlns:a="http://schemas.openxmlformats.org/drawingml/2006/main">
               <a:ext uri="{FF2B5EF4-FFF2-40B4-BE49-F238E27FC236}">
-                <a16:creationId xmlns:a16="http://schemas.microsoft.com/office/drawing/2014/main" id="{72E9A3DC-2AC6-4166-A6E0-5734691DC2CD}"/>
+                <a16:creationId xmlns:a16="http://schemas.microsoft.com/office/drawing/2014/main" id="{1EDD4E65-4753-4DB8-B99E-3E8DC8EB9AF5}"/>
               </a:ext>
             </a:extLst>
           </p:cNvPr>
@@ -6562,7 +6562,7 @@
           <p:cNvPr id="22" name="">
             <a:extLst xmlns:a="http://schemas.openxmlformats.org/drawingml/2006/main">
               <a:ext uri="{FF2B5EF4-FFF2-40B4-BE49-F238E27FC236}">
-                <a16:creationId xmlns:a16="http://schemas.microsoft.com/office/drawing/2014/main" id="{6299E921-587C-446F-9998-C1FD2C66E019}"/>
+                <a16:creationId xmlns:a16="http://schemas.microsoft.com/office/drawing/2014/main" id="{29CF3BC7-EE30-41B6-BCAB-4A63E5EB90A6}"/>
               </a:ext>
             </a:extLst>
           </p:cNvPr>
@@ -6617,7 +6617,7 @@
     </p:spTree>
     <p:extLst>
       <p:ext uri="{BB962C8B-B14F-4D97-AF65-F5344CB8AC3E}">
-        <p14:creationId xmlns:p14="http://schemas.microsoft.com/office/powerpoint/2010/main" val="1346689971"/>
+        <p14:creationId xmlns:p14="http://schemas.microsoft.com/office/powerpoint/2010/main" val="1491584309"/>
       </p:ext>
     </p:extLst>
   </p:cSld>
@@ -6818,7 +6818,7 @@
           <p:cNvPr id="16" name="">
             <a:extLst xmlns:a="http://schemas.openxmlformats.org/drawingml/2006/main">
               <a:ext uri="{FF2B5EF4-FFF2-40B4-BE49-F238E27FC236}">
-                <a16:creationId xmlns:a16="http://schemas.microsoft.com/office/drawing/2014/main" id="{7067125A-B732-4FC8-A707-69286229027D}"/>
+                <a16:creationId xmlns:a16="http://schemas.microsoft.com/office/drawing/2014/main" id="{8D2EFDAF-4EA0-4B98-9942-5D75FE81D719}"/>
               </a:ext>
             </a:extLst>
           </p:cNvPr>
@@ -6850,7 +6850,7 @@
           <p:cNvPr id="2" name="">
             <a:extLst xmlns:a="http://schemas.openxmlformats.org/drawingml/2006/main">
               <a:ext uri="{FF2B5EF4-FFF2-40B4-BE49-F238E27FC236}">
-                <a16:creationId xmlns:a16="http://schemas.microsoft.com/office/drawing/2014/main" id="{931D1B04-B318-4ECF-A388-4A8BBE41B161}"/>
+                <a16:creationId xmlns:a16="http://schemas.microsoft.com/office/drawing/2014/main" id="{FF643F3C-3CC5-45FC-9485-F0ABC2E1E798}"/>
               </a:ext>
             </a:extLst>
           </p:cNvPr>
@@ -6907,7 +6907,7 @@
           <p:cNvPr id="3" name="">
             <a:extLst xmlns:a="http://schemas.openxmlformats.org/drawingml/2006/main">
               <a:ext uri="{FF2B5EF4-FFF2-40B4-BE49-F238E27FC236}">
-                <a16:creationId xmlns:a16="http://schemas.microsoft.com/office/drawing/2014/main" id="{EFD7ED51-1C08-428F-A170-E96196BC7FA5}"/>
+                <a16:creationId xmlns:a16="http://schemas.microsoft.com/office/drawing/2014/main" id="{2F7A0419-08CE-436B-8C32-207A858ED6C1}"/>
               </a:ext>
             </a:extLst>
           </p:cNvPr>
@@ -6939,7 +6939,7 @@
           <p:cNvPr id="4" name="">
             <a:extLst xmlns:a="http://schemas.openxmlformats.org/drawingml/2006/main">
               <a:ext uri="{FF2B5EF4-FFF2-40B4-BE49-F238E27FC236}">
-                <a16:creationId xmlns:a16="http://schemas.microsoft.com/office/drawing/2014/main" id="{3C1AC231-9BAF-4931-8A28-194EE97FD8CE}"/>
+                <a16:creationId xmlns:a16="http://schemas.microsoft.com/office/drawing/2014/main" id="{759DF477-57C1-40E1-A0C8-8B15D48BCCC9}"/>
               </a:ext>
             </a:extLst>
           </p:cNvPr>
@@ -6996,7 +6996,7 @@
           <p:cNvPr id="5" name="">
             <a:extLst xmlns:a="http://schemas.openxmlformats.org/drawingml/2006/main">
               <a:ext uri="{FF2B5EF4-FFF2-40B4-BE49-F238E27FC236}">
-                <a16:creationId xmlns:a16="http://schemas.microsoft.com/office/drawing/2014/main" id="{50200FA5-BB6E-4F20-9619-460CBA178D42}"/>
+                <a16:creationId xmlns:a16="http://schemas.microsoft.com/office/drawing/2014/main" id="{4820905F-2664-4B83-9003-7DDB6E9488D5}"/>
               </a:ext>
             </a:extLst>
           </p:cNvPr>
@@ -7053,7 +7053,7 @@
           <p:cNvPr id="6" name="">
             <a:extLst xmlns:a="http://schemas.openxmlformats.org/drawingml/2006/main">
               <a:ext uri="{FF2B5EF4-FFF2-40B4-BE49-F238E27FC236}">
-                <a16:creationId xmlns:a16="http://schemas.microsoft.com/office/drawing/2014/main" id="{58FC8B67-9DBC-4D46-8108-5D413098DA72}"/>
+                <a16:creationId xmlns:a16="http://schemas.microsoft.com/office/drawing/2014/main" id="{C7863319-C9A2-423E-9F2A-707A3348DF56}"/>
               </a:ext>
             </a:extLst>
           </p:cNvPr>
@@ -7110,7 +7110,7 @@
           <p:cNvPr id="7" name="">
             <a:extLst xmlns:a="http://schemas.openxmlformats.org/drawingml/2006/main">
               <a:ext uri="{FF2B5EF4-FFF2-40B4-BE49-F238E27FC236}">
-                <a16:creationId xmlns:a16="http://schemas.microsoft.com/office/drawing/2014/main" id="{FBB0856F-8E96-4158-AF10-E48C544563CE}"/>
+                <a16:creationId xmlns:a16="http://schemas.microsoft.com/office/drawing/2014/main" id="{31E9CE61-2D3F-4C6B-814D-E224F288640A}"/>
               </a:ext>
             </a:extLst>
           </p:cNvPr>
@@ -7142,7 +7142,7 @@
           <p:cNvPr id="8" name="">
             <a:extLst xmlns:a="http://schemas.openxmlformats.org/drawingml/2006/main">
               <a:ext uri="{FF2B5EF4-FFF2-40B4-BE49-F238E27FC236}">
-                <a16:creationId xmlns:a16="http://schemas.microsoft.com/office/drawing/2014/main" id="{62CB68F9-2990-4461-B2D4-965C66A45CCD}"/>
+                <a16:creationId xmlns:a16="http://schemas.microsoft.com/office/drawing/2014/main" id="{697E198B-012C-4C2F-B2B3-C2DC4B80629A}"/>
               </a:ext>
             </a:extLst>
           </p:cNvPr>
@@ -7199,7 +7199,7 @@
           <p:cNvPr id="9" name="">
             <a:extLst xmlns:a="http://schemas.openxmlformats.org/drawingml/2006/main">
               <a:ext uri="{FF2B5EF4-FFF2-40B4-BE49-F238E27FC236}">
-                <a16:creationId xmlns:a16="http://schemas.microsoft.com/office/drawing/2014/main" id="{747176F4-C182-4639-B5D1-B3E299B513B8}"/>
+                <a16:creationId xmlns:a16="http://schemas.microsoft.com/office/drawing/2014/main" id="{BDF8D315-EBBE-4A79-915D-C29AFCA8A5A0}"/>
               </a:ext>
             </a:extLst>
           </p:cNvPr>
@@ -7256,7 +7256,7 @@
           <p:cNvPr id="10" name="">
             <a:extLst xmlns:a="http://schemas.openxmlformats.org/drawingml/2006/main">
               <a:ext uri="{FF2B5EF4-FFF2-40B4-BE49-F238E27FC236}">
-                <a16:creationId xmlns:a16="http://schemas.microsoft.com/office/drawing/2014/main" id="{11DF31CF-24F4-485A-AB09-3144F44B51E2}"/>
+                <a16:creationId xmlns:a16="http://schemas.microsoft.com/office/drawing/2014/main" id="{2E926F69-9D4A-41A2-9A07-DCE8E9DB5443}"/>
               </a:ext>
             </a:extLst>
           </p:cNvPr>
@@ -7313,7 +7313,7 @@
           <p:cNvPr id="11" name="">
             <a:extLst xmlns:a="http://schemas.openxmlformats.org/drawingml/2006/main">
               <a:ext uri="{FF2B5EF4-FFF2-40B4-BE49-F238E27FC236}">
-                <a16:creationId xmlns:a16="http://schemas.microsoft.com/office/drawing/2014/main" id="{2F36A78B-286A-49C4-A4F5-3A28370A2BCD}"/>
+                <a16:creationId xmlns:a16="http://schemas.microsoft.com/office/drawing/2014/main" id="{2D280F38-5186-43C8-864A-7C6E7E87A0A7}"/>
               </a:ext>
             </a:extLst>
           </p:cNvPr>
@@ -7345,7 +7345,7 @@
           <p:cNvPr id="12" name="">
             <a:extLst xmlns:a="http://schemas.openxmlformats.org/drawingml/2006/main">
               <a:ext uri="{FF2B5EF4-FFF2-40B4-BE49-F238E27FC236}">
-                <a16:creationId xmlns:a16="http://schemas.microsoft.com/office/drawing/2014/main" id="{9D89D245-1C08-456A-AC6E-0D19D5CE70E6}"/>
+                <a16:creationId xmlns:a16="http://schemas.microsoft.com/office/drawing/2014/main" id="{C37A8A30-512D-4C0C-9DD1-02DC6E30BED9}"/>
               </a:ext>
             </a:extLst>
           </p:cNvPr>
@@ -7402,7 +7402,7 @@
           <p:cNvPr id="13" name="">
             <a:extLst xmlns:a="http://schemas.openxmlformats.org/drawingml/2006/main">
               <a:ext uri="{FF2B5EF4-FFF2-40B4-BE49-F238E27FC236}">
-                <a16:creationId xmlns:a16="http://schemas.microsoft.com/office/drawing/2014/main" id="{ACC658E1-5BEF-4B80-A343-C6C1B2218E5E}"/>
+                <a16:creationId xmlns:a16="http://schemas.microsoft.com/office/drawing/2014/main" id="{53785BAD-9F62-4334-8888-3025CCE232C6}"/>
               </a:ext>
             </a:extLst>
           </p:cNvPr>
@@ -7459,7 +7459,7 @@
           <p:cNvPr id="14" name="">
             <a:extLst xmlns:a="http://schemas.openxmlformats.org/drawingml/2006/main">
               <a:ext uri="{FF2B5EF4-FFF2-40B4-BE49-F238E27FC236}">
-                <a16:creationId xmlns:a16="http://schemas.microsoft.com/office/drawing/2014/main" id="{FB77639F-69C3-4034-AEFB-3ADD65A584BC}"/>
+                <a16:creationId xmlns:a16="http://schemas.microsoft.com/office/drawing/2014/main" id="{DD44A0B1-B8E0-4D37-8AD5-BB9C26D7E887}"/>
               </a:ext>
             </a:extLst>
           </p:cNvPr>
@@ -7516,7 +7516,7 @@
           <p:cNvPr id="15" name="">
             <a:extLst xmlns:a="http://schemas.openxmlformats.org/drawingml/2006/main">
               <a:ext uri="{FF2B5EF4-FFF2-40B4-BE49-F238E27FC236}">
-                <a16:creationId xmlns:a16="http://schemas.microsoft.com/office/drawing/2014/main" id="{02DAA1C7-8752-418B-B82A-FA3673F85E14}"/>
+                <a16:creationId xmlns:a16="http://schemas.microsoft.com/office/drawing/2014/main" id="{2DC1F0F2-D270-4D04-BA04-8129E1852312}"/>
               </a:ext>
             </a:extLst>
           </p:cNvPr>
@@ -7571,7 +7571,7 @@
     </p:spTree>
     <p:extLst>
       <p:ext uri="{BB962C8B-B14F-4D97-AF65-F5344CB8AC3E}">
-        <p14:creationId xmlns:p14="http://schemas.microsoft.com/office/powerpoint/2010/main" val="2094520043"/>
+        <p14:creationId xmlns:p14="http://schemas.microsoft.com/office/powerpoint/2010/main" val="554631055"/>
       </p:ext>
     </p:extLst>
   </p:cSld>
@@ -7769,10 +7769,10 @@
       </p:grpSpPr>
       <p:sp>
         <p:nvSpPr>
-          <p:cNvPr id="21" name="">
-            <a:extLst xmlns:a="http://schemas.openxmlformats.org/drawingml/2006/main">
-              <a:ext uri="{FF2B5EF4-FFF2-40B4-BE49-F238E27FC236}">
-                <a16:creationId xmlns:a16="http://schemas.microsoft.com/office/drawing/2014/main" id="{67BCF707-25B0-4432-A195-DCF24F917F4E}"/>
+          <p:cNvPr id="29" name="">
+            <a:extLst xmlns:a="http://schemas.openxmlformats.org/drawingml/2006/main">
+              <a:ext uri="{FF2B5EF4-FFF2-40B4-BE49-F238E27FC236}">
+                <a16:creationId xmlns:a16="http://schemas.microsoft.com/office/drawing/2014/main" id="{A47BAAD8-765C-4E14-A8AB-DDC0D80E016F}"/>
               </a:ext>
             </a:extLst>
           </p:cNvPr>
@@ -7804,7 +7804,7 @@
           <p:cNvPr id="2" name="">
             <a:extLst xmlns:a="http://schemas.openxmlformats.org/drawingml/2006/main">
               <a:ext uri="{FF2B5EF4-FFF2-40B4-BE49-F238E27FC236}">
-                <a16:creationId xmlns:a16="http://schemas.microsoft.com/office/drawing/2014/main" id="{FD7DC939-39AF-43B9-B107-0BEBD78EF313}"/>
+                <a16:creationId xmlns:a16="http://schemas.microsoft.com/office/drawing/2014/main" id="{C373F7BB-A6BE-4117-970E-CFB13AB1DAD4}"/>
               </a:ext>
             </a:extLst>
           </p:cNvPr>
@@ -7861,7 +7861,7 @@
           <p:cNvPr id="3" name="">
             <a:extLst xmlns:a="http://schemas.openxmlformats.org/drawingml/2006/main">
               <a:ext uri="{FF2B5EF4-FFF2-40B4-BE49-F238E27FC236}">
-                <a16:creationId xmlns:a16="http://schemas.microsoft.com/office/drawing/2014/main" id="{0C795B34-4BCE-4020-8B95-42E577F63052}"/>
+                <a16:creationId xmlns:a16="http://schemas.microsoft.com/office/drawing/2014/main" id="{012042B6-AC36-45B8-9003-D78BAA6D828F}"/>
               </a:ext>
             </a:extLst>
           </p:cNvPr>
@@ -7893,7 +7893,7 @@
           <p:cNvPr id="4" name="">
             <a:extLst xmlns:a="http://schemas.openxmlformats.org/drawingml/2006/main">
               <a:ext uri="{FF2B5EF4-FFF2-40B4-BE49-F238E27FC236}">
-                <a16:creationId xmlns:a16="http://schemas.microsoft.com/office/drawing/2014/main" id="{572023E5-AC87-470A-B861-6E47F9B61B74}"/>
+                <a16:creationId xmlns:a16="http://schemas.microsoft.com/office/drawing/2014/main" id="{265E5FBF-D533-4438-8A29-B029C06D424C}"/>
               </a:ext>
             </a:extLst>
           </p:cNvPr>
@@ -7950,7 +7950,7 @@
           <p:cNvPr id="5" name="">
             <a:extLst xmlns:a="http://schemas.openxmlformats.org/drawingml/2006/main">
               <a:ext uri="{FF2B5EF4-FFF2-40B4-BE49-F238E27FC236}">
-                <a16:creationId xmlns:a16="http://schemas.microsoft.com/office/drawing/2014/main" id="{64018707-8C4B-4EE2-9D49-FF379850850C}"/>
+                <a16:creationId xmlns:a16="http://schemas.microsoft.com/office/drawing/2014/main" id="{E53CA5D1-33E3-4D87-B897-D2E5582AD773}"/>
               </a:ext>
             </a:extLst>
           </p:cNvPr>
@@ -8007,7 +8007,7 @@
           <p:cNvPr id="6" name="">
             <a:extLst xmlns:a="http://schemas.openxmlformats.org/drawingml/2006/main">
               <a:ext uri="{FF2B5EF4-FFF2-40B4-BE49-F238E27FC236}">
-                <a16:creationId xmlns:a16="http://schemas.microsoft.com/office/drawing/2014/main" id="{79D58E2B-0607-4BBA-A22A-C0023EA6155D}"/>
+                <a16:creationId xmlns:a16="http://schemas.microsoft.com/office/drawing/2014/main" id="{45208434-EEBD-4189-9997-AB2328D131C9}"/>
               </a:ext>
             </a:extLst>
           </p:cNvPr>
@@ -8064,7 +8064,7 @@
           <p:cNvPr id="7" name="">
             <a:extLst xmlns:a="http://schemas.openxmlformats.org/drawingml/2006/main">
               <a:ext uri="{FF2B5EF4-FFF2-40B4-BE49-F238E27FC236}">
-                <a16:creationId xmlns:a16="http://schemas.microsoft.com/office/drawing/2014/main" id="{594EF202-4F37-4E26-AE8B-033AAD9F080A}"/>
+                <a16:creationId xmlns:a16="http://schemas.microsoft.com/office/drawing/2014/main" id="{0BC3CA7C-2BCA-4964-BA75-2F629C5FEC12}"/>
               </a:ext>
             </a:extLst>
           </p:cNvPr>
@@ -8096,7 +8096,7 @@
           <p:cNvPr id="8" name="">
             <a:extLst xmlns:a="http://schemas.openxmlformats.org/drawingml/2006/main">
               <a:ext uri="{FF2B5EF4-FFF2-40B4-BE49-F238E27FC236}">
-                <a16:creationId xmlns:a16="http://schemas.microsoft.com/office/drawing/2014/main" id="{1510E3FE-7732-4896-8B49-DC4FB719F3C2}"/>
+                <a16:creationId xmlns:a16="http://schemas.microsoft.com/office/drawing/2014/main" id="{352AE033-C28C-4937-A7F2-36EEC376A2BB}"/>
               </a:ext>
             </a:extLst>
           </p:cNvPr>
@@ -8153,7 +8153,7 @@
           <p:cNvPr id="9" name="">
             <a:extLst xmlns:a="http://schemas.openxmlformats.org/drawingml/2006/main">
               <a:ext uri="{FF2B5EF4-FFF2-40B4-BE49-F238E27FC236}">
-                <a16:creationId xmlns:a16="http://schemas.microsoft.com/office/drawing/2014/main" id="{04AF2112-98DA-4A68-BC48-A8272AAB75DC}"/>
+                <a16:creationId xmlns:a16="http://schemas.microsoft.com/office/drawing/2014/main" id="{8627A362-5248-4C35-9FF1-B70358BEAA53}"/>
               </a:ext>
             </a:extLst>
           </p:cNvPr>
@@ -8210,19 +8210,19 @@
           <p:cNvPr id="10" name="">
             <a:extLst xmlns:a="http://schemas.openxmlformats.org/drawingml/2006/main">
               <a:ext uri="{FF2B5EF4-FFF2-40B4-BE49-F238E27FC236}">
-                <a16:creationId xmlns:a16="http://schemas.microsoft.com/office/drawing/2014/main" id="{07574715-E11C-4A18-8A46-E4798EFC3F7C}"/>
-              </a:ext>
-            </a:extLst>
-          </p:cNvPr>
-          <p:cNvSpPr>
-            <a:spLocks xmlns:a="http://schemas.openxmlformats.org/drawingml/2006/main" noGrp="1"/>
-          </p:cNvSpPr>
-          <p:nvPr/>
-        </p:nvSpPr>
-        <p:spPr>
-          <a:xfrm xmlns:a="http://schemas.openxmlformats.org/drawingml/2006/main">
-            <a:off x="914400" y="1257300"/>
-            <a:ext cx="10363200" cy="781050"/>
+                <a16:creationId xmlns:a16="http://schemas.microsoft.com/office/drawing/2014/main" id="{0A60A749-12BB-456F-B155-EB6B06C4257B}"/>
+              </a:ext>
+            </a:extLst>
+          </p:cNvPr>
+          <p:cNvSpPr>
+            <a:spLocks xmlns:a="http://schemas.openxmlformats.org/drawingml/2006/main" noGrp="1"/>
+          </p:cNvSpPr>
+          <p:nvPr/>
+        </p:nvSpPr>
+        <p:spPr>
+          <a:xfrm xmlns:a="http://schemas.openxmlformats.org/drawingml/2006/main">
+            <a:off x="857250" y="1219200"/>
+            <a:ext cx="10477500" cy="742950"/>
           </a:xfrm>
           <a:prstGeom xmlns:a="http://schemas.openxmlformats.org/drawingml/2006/main" prst="rect">
             <a:avLst/>
@@ -8239,7 +8239,7 @@
           <a:lstStyle xmlns:a="http://schemas.openxmlformats.org/drawingml/2006/main"/>
           <a:p xmlns:a="http://schemas.openxmlformats.org/drawingml/2006/main">
             <a:pPr algn="ctr">
-              <a:defRPr sz="2175" b="1">
+              <a:defRPr sz="2100" b="1">
                 <a:solidFill>
                   <a:srgbClr val="17253A"/>
                 </a:solidFill>
@@ -8249,7 +8249,7 @@
               </a:defRPr>
             </a:pPr>
             <a:r>
-              <a:rPr sz="2175" b="1">
+              <a:rPr sz="2100" b="1">
                 <a:solidFill>
                   <a:srgbClr val="17253A"/>
                 </a:solidFill>
@@ -8267,29 +8267,173 @@
           <p:cNvPr id="11" name="">
             <a:extLst xmlns:a="http://schemas.openxmlformats.org/drawingml/2006/main">
               <a:ext uri="{FF2B5EF4-FFF2-40B4-BE49-F238E27FC236}">
-                <a16:creationId xmlns:a16="http://schemas.microsoft.com/office/drawing/2014/main" id="{C3015B99-629B-4664-AB19-311AFF7E4C7C}"/>
-              </a:ext>
-            </a:extLst>
-          </p:cNvPr>
-          <p:cNvSpPr>
-            <a:spLocks xmlns:a="http://schemas.openxmlformats.org/drawingml/2006/main" noGrp="1"/>
-          </p:cNvSpPr>
-          <p:nvPr/>
-        </p:nvSpPr>
-        <p:spPr>
-          <a:xfrm xmlns:a="http://schemas.openxmlformats.org/drawingml/2006/main">
-            <a:off x="685800" y="2247900"/>
-            <a:ext cx="3905250" cy="3333750"/>
-          </a:xfrm>
-          <a:prstGeom xmlns:a="http://schemas.openxmlformats.org/drawingml/2006/main" prst="roundRect">
-            <a:avLst>
-              <a:gd name="adj" fmla="val 2286"/>
-            </a:avLst>
+                <a16:creationId xmlns:a16="http://schemas.microsoft.com/office/drawing/2014/main" id="{AE0B58F7-32CF-4CBF-934A-909BC630C81E}"/>
+              </a:ext>
+            </a:extLst>
+          </p:cNvPr>
+          <p:cNvSpPr>
+            <a:spLocks xmlns:a="http://schemas.openxmlformats.org/drawingml/2006/main" noGrp="1"/>
+          </p:cNvSpPr>
+          <p:nvPr/>
+        </p:nvSpPr>
+        <p:spPr>
+          <a:xfrm xmlns:a="http://schemas.openxmlformats.org/drawingml/2006/main">
+            <a:off x="971550" y="2124075"/>
+            <a:ext cx="38100" cy="3524250"/>
+          </a:xfrm>
+          <a:prstGeom xmlns:a="http://schemas.openxmlformats.org/drawingml/2006/main" prst="rect">
+            <a:avLst/>
           </a:prstGeom>
           <a:solidFill xmlns:a="http://schemas.openxmlformats.org/drawingml/2006/main">
-            <a:srgbClr val="FFFFFF"/>
+            <a:srgbClr val="2C6E73"/>
           </a:solidFill>
-          <a:ln xmlns:a="http://schemas.openxmlformats.org/drawingml/2006/main" w="12383">
+          <a:ln xmlns:a="http://schemas.openxmlformats.org/drawingml/2006/main" w="0">
+            <a:solidFill>
+              <a:srgbClr val="2C6E73"/>
+            </a:solidFill>
+          </a:ln>
+        </p:spPr>
+      </p:sp>
+      <p:sp>
+        <p:nvSpPr>
+          <p:cNvPr id="12" name="">
+            <a:extLst xmlns:a="http://schemas.openxmlformats.org/drawingml/2006/main">
+              <a:ext uri="{FF2B5EF4-FFF2-40B4-BE49-F238E27FC236}">
+                <a16:creationId xmlns:a16="http://schemas.microsoft.com/office/drawing/2014/main" id="{C795F199-2FB3-4CA5-A663-371FDF36D8F7}"/>
+              </a:ext>
+            </a:extLst>
+          </p:cNvPr>
+          <p:cNvSpPr>
+            <a:spLocks xmlns:a="http://schemas.openxmlformats.org/drawingml/2006/main" noGrp="1"/>
+          </p:cNvSpPr>
+          <p:nvPr/>
+        </p:nvSpPr>
+        <p:spPr>
+          <a:xfrm xmlns:a="http://schemas.openxmlformats.org/drawingml/2006/main">
+            <a:off x="1162050" y="2200275"/>
+            <a:ext cx="400050" cy="400050"/>
+          </a:xfrm>
+          <a:prstGeom xmlns:a="http://schemas.openxmlformats.org/drawingml/2006/main" prst="rect">
+            <a:avLst/>
+          </a:prstGeom>
+          <a:noFill xmlns:a="http://schemas.openxmlformats.org/drawingml/2006/main"/>
+          <a:ln xmlns:a="http://schemas.openxmlformats.org/drawingml/2006/main" w="0">
+            <a:noFill/>
+          </a:ln>
+        </p:spPr>
+        <p:txBody>
+          <a:bodyPr xmlns:a="http://schemas.openxmlformats.org/drawingml/2006/main" anchor="ctr">
+            <a:normAutofit fontScale="100000"/>
+          </a:bodyPr>
+          <a:lstStyle xmlns:a="http://schemas.openxmlformats.org/drawingml/2006/main"/>
+          <a:p xmlns:a="http://schemas.openxmlformats.org/drawingml/2006/main">
+            <a:pPr algn="ctr">
+              <a:defRPr sz="1125" b="1">
+                <a:solidFill>
+                  <a:srgbClr val="2C6E73"/>
+                </a:solidFill>
+                <a:latin typeface="Arial"/>
+                <a:ea typeface="Arial"/>
+                <a:cs typeface="Arial"/>
+              </a:defRPr>
+            </a:pPr>
+            <a:r>
+              <a:rPr sz="1125" b="1">
+                <a:solidFill>
+                  <a:srgbClr val="2C6E73"/>
+                </a:solidFill>
+                <a:latin typeface="Arial"/>
+                <a:ea typeface="Arial"/>
+                <a:cs typeface="Arial"/>
+              </a:rPr>
+              <a:t>1</a:t>
+            </a:r>
+          </a:p>
+        </p:txBody>
+      </p:sp>
+      <p:sp>
+        <p:nvSpPr>
+          <p:cNvPr id="13" name="">
+            <a:extLst xmlns:a="http://schemas.openxmlformats.org/drawingml/2006/main">
+              <a:ext uri="{FF2B5EF4-FFF2-40B4-BE49-F238E27FC236}">
+                <a16:creationId xmlns:a16="http://schemas.microsoft.com/office/drawing/2014/main" id="{04DA7F81-FBC1-49B0-9FA2-6251E7B5DD3E}"/>
+              </a:ext>
+            </a:extLst>
+          </p:cNvPr>
+          <p:cNvSpPr>
+            <a:spLocks xmlns:a="http://schemas.openxmlformats.org/drawingml/2006/main" noGrp="1"/>
+          </p:cNvSpPr>
+          <p:nvPr/>
+        </p:nvSpPr>
+        <p:spPr>
+          <a:xfrm xmlns:a="http://schemas.openxmlformats.org/drawingml/2006/main">
+            <a:off x="1714500" y="2114550"/>
+            <a:ext cx="9525000" cy="514350"/>
+          </a:xfrm>
+          <a:prstGeom xmlns:a="http://schemas.openxmlformats.org/drawingml/2006/main" prst="rect">
+            <a:avLst/>
+          </a:prstGeom>
+          <a:noFill xmlns:a="http://schemas.openxmlformats.org/drawingml/2006/main"/>
+          <a:ln xmlns:a="http://schemas.openxmlformats.org/drawingml/2006/main" w="0">
+            <a:noFill/>
+          </a:ln>
+        </p:spPr>
+        <p:txBody>
+          <a:bodyPr xmlns:a="http://schemas.openxmlformats.org/drawingml/2006/main" anchor="ctr">
+            <a:normAutofit fontScale="100000"/>
+          </a:bodyPr>
+          <a:lstStyle xmlns:a="http://schemas.openxmlformats.org/drawingml/2006/main"/>
+          <a:p xmlns:a="http://schemas.openxmlformats.org/drawingml/2006/main">
+            <a:pPr algn="l">
+              <a:defRPr sz="1350" b="0">
+                <a:solidFill>
+                  <a:srgbClr val="17253A"/>
+                </a:solidFill>
+                <a:latin typeface="Arial"/>
+                <a:ea typeface="Arial"/>
+                <a:cs typeface="Arial"/>
+              </a:defRPr>
+            </a:pPr>
+            <a:r>
+              <a:rPr sz="1350" b="0">
+                <a:solidFill>
+                  <a:srgbClr val="17253A"/>
+                </a:solidFill>
+                <a:latin typeface="Arial"/>
+                <a:ea typeface="Arial"/>
+                <a:cs typeface="Arial"/>
+              </a:rPr>
+              <a:t>32 times table: 32, 64, 96, 128, 160, 192, 224, 256, 288</a:t>
+            </a:r>
+          </a:p>
+        </p:txBody>
+      </p:sp>
+      <p:sp>
+        <p:nvSpPr>
+          <p:cNvPr id="14" name="">
+            <a:extLst xmlns:a="http://schemas.openxmlformats.org/drawingml/2006/main">
+              <a:ext uri="{FF2B5EF4-FFF2-40B4-BE49-F238E27FC236}">
+                <a16:creationId xmlns:a16="http://schemas.microsoft.com/office/drawing/2014/main" id="{EFBED814-F629-4D13-BC74-9D2F7E39639E}"/>
+              </a:ext>
+            </a:extLst>
+          </p:cNvPr>
+          <p:cNvSpPr>
+            <a:spLocks xmlns:a="http://schemas.openxmlformats.org/drawingml/2006/main" noGrp="1"/>
+          </p:cNvSpPr>
+          <p:nvPr/>
+        </p:nvSpPr>
+        <p:spPr>
+          <a:xfrm xmlns:a="http://schemas.openxmlformats.org/drawingml/2006/main">
+            <a:off x="1714500" y="2647950"/>
+            <a:ext cx="9334500" cy="9525"/>
+          </a:xfrm>
+          <a:prstGeom xmlns:a="http://schemas.openxmlformats.org/drawingml/2006/main" prst="rect">
+            <a:avLst/>
+          </a:prstGeom>
+          <a:solidFill xmlns:a="http://schemas.openxmlformats.org/drawingml/2006/main">
+            <a:srgbClr val="D9E0E6"/>
+          </a:solidFill>
+          <a:ln xmlns:a="http://schemas.openxmlformats.org/drawingml/2006/main" w="0">
             <a:solidFill>
               <a:srgbClr val="D9E0E6"/>
             </a:solidFill>
@@ -8298,22 +8442,22 @@
       </p:sp>
       <p:sp>
         <p:nvSpPr>
-          <p:cNvPr id="12" name="">
-            <a:extLst xmlns:a="http://schemas.openxmlformats.org/drawingml/2006/main">
-              <a:ext uri="{FF2B5EF4-FFF2-40B4-BE49-F238E27FC236}">
-                <a16:creationId xmlns:a16="http://schemas.microsoft.com/office/drawing/2014/main" id="{6D38746F-53CC-4D0A-80E9-033DF7A7179A}"/>
-              </a:ext>
-            </a:extLst>
-          </p:cNvPr>
-          <p:cNvSpPr>
-            <a:spLocks xmlns:a="http://schemas.openxmlformats.org/drawingml/2006/main" noGrp="1"/>
-          </p:cNvSpPr>
-          <p:nvPr/>
-        </p:nvSpPr>
-        <p:spPr>
-          <a:xfrm xmlns:a="http://schemas.openxmlformats.org/drawingml/2006/main">
-            <a:off x="933450" y="2400300"/>
-            <a:ext cx="3390900" cy="323850"/>
+          <p:cNvPr id="15" name="">
+            <a:extLst xmlns:a="http://schemas.openxmlformats.org/drawingml/2006/main">
+              <a:ext uri="{FF2B5EF4-FFF2-40B4-BE49-F238E27FC236}">
+                <a16:creationId xmlns:a16="http://schemas.microsoft.com/office/drawing/2014/main" id="{517C7701-5795-4C01-98F0-67222944B886}"/>
+              </a:ext>
+            </a:extLst>
+          </p:cNvPr>
+          <p:cNvSpPr>
+            <a:spLocks xmlns:a="http://schemas.openxmlformats.org/drawingml/2006/main" noGrp="1"/>
+          </p:cNvSpPr>
+          <p:nvPr/>
+        </p:nvSpPr>
+        <p:spPr>
+          <a:xfrm xmlns:a="http://schemas.openxmlformats.org/drawingml/2006/main">
+            <a:off x="1162050" y="2781300"/>
+            <a:ext cx="400050" cy="400050"/>
           </a:xfrm>
           <a:prstGeom xmlns:a="http://schemas.openxmlformats.org/drawingml/2006/main" prst="rect">
             <a:avLst/>
@@ -8330,7 +8474,7 @@
           <a:lstStyle xmlns:a="http://schemas.openxmlformats.org/drawingml/2006/main"/>
           <a:p xmlns:a="http://schemas.openxmlformats.org/drawingml/2006/main">
             <a:pPr algn="ctr">
-              <a:defRPr sz="1350" b="1">
+              <a:defRPr sz="1125" b="1">
                 <a:solidFill>
                   <a:srgbClr val="2C6E73"/>
                 </a:solidFill>
@@ -8340,7 +8484,7 @@
               </a:defRPr>
             </a:pPr>
             <a:r>
-              <a:rPr sz="1350" b="1">
+              <a:rPr sz="1125" b="1">
                 <a:solidFill>
                   <a:srgbClr val="2C6E73"/>
                 </a:solidFill>
@@ -8348,29 +8492,29 @@
                 <a:ea typeface="Arial"/>
                 <a:cs typeface="Arial"/>
               </a:rPr>
-              <a:t>Useful multiples</a:t>
-            </a:r>
-          </a:p>
-        </p:txBody>
-      </p:sp>
-      <p:sp>
-        <p:nvSpPr>
-          <p:cNvPr id="13" name="">
-            <a:extLst xmlns:a="http://schemas.openxmlformats.org/drawingml/2006/main">
-              <a:ext uri="{FF2B5EF4-FFF2-40B4-BE49-F238E27FC236}">
-                <a16:creationId xmlns:a16="http://schemas.microsoft.com/office/drawing/2014/main" id="{BE0030F6-0CB3-4008-9339-2F26862BD345}"/>
-              </a:ext>
-            </a:extLst>
-          </p:cNvPr>
-          <p:cNvSpPr>
-            <a:spLocks xmlns:a="http://schemas.openxmlformats.org/drawingml/2006/main" noGrp="1"/>
-          </p:cNvSpPr>
-          <p:nvPr/>
-        </p:nvSpPr>
-        <p:spPr>
-          <a:xfrm xmlns:a="http://schemas.openxmlformats.org/drawingml/2006/main">
-            <a:off x="914400" y="2952750"/>
-            <a:ext cx="3448050" cy="514350"/>
+              <a:t>2</a:t>
+            </a:r>
+          </a:p>
+        </p:txBody>
+      </p:sp>
+      <p:sp>
+        <p:nvSpPr>
+          <p:cNvPr id="16" name="">
+            <a:extLst xmlns:a="http://schemas.openxmlformats.org/drawingml/2006/main">
+              <a:ext uri="{FF2B5EF4-FFF2-40B4-BE49-F238E27FC236}">
+                <a16:creationId xmlns:a16="http://schemas.microsoft.com/office/drawing/2014/main" id="{566EAA65-4FEA-4023-8122-E068F52AD0E7}"/>
+              </a:ext>
+            </a:extLst>
+          </p:cNvPr>
+          <p:cNvSpPr>
+            <a:spLocks xmlns:a="http://schemas.openxmlformats.org/drawingml/2006/main" noGrp="1"/>
+          </p:cNvSpPr>
+          <p:nvPr/>
+        </p:nvSpPr>
+        <p:spPr>
+          <a:xfrm xmlns:a="http://schemas.openxmlformats.org/drawingml/2006/main">
+            <a:off x="1714500" y="2695575"/>
+            <a:ext cx="9525000" cy="514350"/>
           </a:xfrm>
           <a:prstGeom xmlns:a="http://schemas.openxmlformats.org/drawingml/2006/main" prst="rect">
             <a:avLst/>
@@ -8386,8 +8530,8 @@
           </a:bodyPr>
           <a:lstStyle xmlns:a="http://schemas.openxmlformats.org/drawingml/2006/main"/>
           <a:p xmlns:a="http://schemas.openxmlformats.org/drawingml/2006/main">
-            <a:pPr algn="ctr">
-              <a:defRPr sz="1275" b="1">
+            <a:pPr algn="l">
+              <a:defRPr sz="1350" b="0">
                 <a:solidFill>
                   <a:srgbClr val="17253A"/>
                 </a:solidFill>
@@ -8397,7 +8541,7 @@
               </a:defRPr>
             </a:pPr>
             <a:r>
-              <a:rPr sz="1275" b="1">
+              <a:rPr sz="1350" b="0">
                 <a:solidFill>
                   <a:srgbClr val="17253A"/>
                 </a:solidFill>
@@ -8405,29 +8549,61 @@
                 <a:ea typeface="Arial"/>
                 <a:cs typeface="Arial"/>
               </a:rPr>
-              <a:t>1 × 32 = 32     2 × 32 = 64     3 × 32 = 96</a:t>
-            </a:r>
-          </a:p>
-        </p:txBody>
-      </p:sp>
-      <p:sp>
-        <p:nvSpPr>
-          <p:cNvPr id="14" name="">
-            <a:extLst xmlns:a="http://schemas.openxmlformats.org/drawingml/2006/main">
-              <a:ext uri="{FF2B5EF4-FFF2-40B4-BE49-F238E27FC236}">
-                <a16:creationId xmlns:a16="http://schemas.microsoft.com/office/drawing/2014/main" id="{9D45395E-3113-4EB7-BA5E-1447D1F6FECA}"/>
-              </a:ext>
-            </a:extLst>
-          </p:cNvPr>
-          <p:cNvSpPr>
-            <a:spLocks xmlns:a="http://schemas.openxmlformats.org/drawingml/2006/main" noGrp="1"/>
-          </p:cNvSpPr>
-          <p:nvPr/>
-        </p:nvSpPr>
-        <p:spPr>
-          <a:xfrm xmlns:a="http://schemas.openxmlformats.org/drawingml/2006/main">
-            <a:off x="914400" y="3695700"/>
-            <a:ext cx="3448050" cy="514350"/>
+              <a:t>67 ÷ 32: choose 64 = 32 × 2; write 2</a:t>
+            </a:r>
+          </a:p>
+        </p:txBody>
+      </p:sp>
+      <p:sp>
+        <p:nvSpPr>
+          <p:cNvPr id="17" name="">
+            <a:extLst xmlns:a="http://schemas.openxmlformats.org/drawingml/2006/main">
+              <a:ext uri="{FF2B5EF4-FFF2-40B4-BE49-F238E27FC236}">
+                <a16:creationId xmlns:a16="http://schemas.microsoft.com/office/drawing/2014/main" id="{81F137C0-5D7C-4399-9A8F-6CF6A2D3AA6B}"/>
+              </a:ext>
+            </a:extLst>
+          </p:cNvPr>
+          <p:cNvSpPr>
+            <a:spLocks xmlns:a="http://schemas.openxmlformats.org/drawingml/2006/main" noGrp="1"/>
+          </p:cNvSpPr>
+          <p:nvPr/>
+        </p:nvSpPr>
+        <p:spPr>
+          <a:xfrm xmlns:a="http://schemas.openxmlformats.org/drawingml/2006/main">
+            <a:off x="1714500" y="3228975"/>
+            <a:ext cx="9334500" cy="9525"/>
+          </a:xfrm>
+          <a:prstGeom xmlns:a="http://schemas.openxmlformats.org/drawingml/2006/main" prst="rect">
+            <a:avLst/>
+          </a:prstGeom>
+          <a:solidFill xmlns:a="http://schemas.openxmlformats.org/drawingml/2006/main">
+            <a:srgbClr val="D9E0E6"/>
+          </a:solidFill>
+          <a:ln xmlns:a="http://schemas.openxmlformats.org/drawingml/2006/main" w="0">
+            <a:solidFill>
+              <a:srgbClr val="D9E0E6"/>
+            </a:solidFill>
+          </a:ln>
+        </p:spPr>
+      </p:sp>
+      <p:sp>
+        <p:nvSpPr>
+          <p:cNvPr id="18" name="">
+            <a:extLst xmlns:a="http://schemas.openxmlformats.org/drawingml/2006/main">
+              <a:ext uri="{FF2B5EF4-FFF2-40B4-BE49-F238E27FC236}">
+                <a16:creationId xmlns:a16="http://schemas.microsoft.com/office/drawing/2014/main" id="{57AF6061-4FD4-428E-B8A4-E1AF4A3CCCA3}"/>
+              </a:ext>
+            </a:extLst>
+          </p:cNvPr>
+          <p:cNvSpPr>
+            <a:spLocks xmlns:a="http://schemas.openxmlformats.org/drawingml/2006/main" noGrp="1"/>
+          </p:cNvSpPr>
+          <p:nvPr/>
+        </p:nvSpPr>
+        <p:spPr>
+          <a:xfrm xmlns:a="http://schemas.openxmlformats.org/drawingml/2006/main">
+            <a:off x="1162050" y="3362325"/>
+            <a:ext cx="400050" cy="400050"/>
           </a:xfrm>
           <a:prstGeom xmlns:a="http://schemas.openxmlformats.org/drawingml/2006/main" prst="rect">
             <a:avLst/>
@@ -8444,9 +8620,9 @@
           <a:lstStyle xmlns:a="http://schemas.openxmlformats.org/drawingml/2006/main"/>
           <a:p xmlns:a="http://schemas.openxmlformats.org/drawingml/2006/main">
             <a:pPr algn="ctr">
-              <a:defRPr sz="1275" b="1">
-                <a:solidFill>
-                  <a:srgbClr val="17253A"/>
+              <a:defRPr sz="1125" b="1">
+                <a:solidFill>
+                  <a:srgbClr val="2C6E73"/>
                 </a:solidFill>
                 <a:latin typeface="Arial"/>
                 <a:ea typeface="Arial"/>
@@ -8454,37 +8630,37 @@
               </a:defRPr>
             </a:pPr>
             <a:r>
-              <a:rPr sz="1275" b="1">
-                <a:solidFill>
-                  <a:srgbClr val="17253A"/>
+              <a:rPr sz="1125" b="1">
+                <a:solidFill>
+                  <a:srgbClr val="2C6E73"/>
                 </a:solidFill>
                 <a:latin typeface="Arial"/>
                 <a:ea typeface="Arial"/>
                 <a:cs typeface="Arial"/>
               </a:rPr>
-              <a:t>4 × 32 = 128     5 × 32 = 160     6 × 32 = 192</a:t>
-            </a:r>
-          </a:p>
-        </p:txBody>
-      </p:sp>
-      <p:sp>
-        <p:nvSpPr>
-          <p:cNvPr id="15" name="">
-            <a:extLst xmlns:a="http://schemas.openxmlformats.org/drawingml/2006/main">
-              <a:ext uri="{FF2B5EF4-FFF2-40B4-BE49-F238E27FC236}">
-                <a16:creationId xmlns:a16="http://schemas.microsoft.com/office/drawing/2014/main" id="{E7288803-42D1-47B7-9170-613179C2A640}"/>
-              </a:ext>
-            </a:extLst>
-          </p:cNvPr>
-          <p:cNvSpPr>
-            <a:spLocks xmlns:a="http://schemas.openxmlformats.org/drawingml/2006/main" noGrp="1"/>
-          </p:cNvSpPr>
-          <p:nvPr/>
-        </p:nvSpPr>
-        <p:spPr>
-          <a:xfrm xmlns:a="http://schemas.openxmlformats.org/drawingml/2006/main">
-            <a:off x="914400" y="4438650"/>
-            <a:ext cx="3448050" cy="514350"/>
+              <a:t>3</a:t>
+            </a:r>
+          </a:p>
+        </p:txBody>
+      </p:sp>
+      <p:sp>
+        <p:nvSpPr>
+          <p:cNvPr id="19" name="">
+            <a:extLst xmlns:a="http://schemas.openxmlformats.org/drawingml/2006/main">
+              <a:ext uri="{FF2B5EF4-FFF2-40B4-BE49-F238E27FC236}">
+                <a16:creationId xmlns:a16="http://schemas.microsoft.com/office/drawing/2014/main" id="{A671739F-935F-48CE-8385-1B5E70133E2D}"/>
+              </a:ext>
+            </a:extLst>
+          </p:cNvPr>
+          <p:cNvSpPr>
+            <a:spLocks xmlns:a="http://schemas.openxmlformats.org/drawingml/2006/main" noGrp="1"/>
+          </p:cNvSpPr>
+          <p:nvPr/>
+        </p:nvSpPr>
+        <p:spPr>
+          <a:xfrm xmlns:a="http://schemas.openxmlformats.org/drawingml/2006/main">
+            <a:off x="1714500" y="3276600"/>
+            <a:ext cx="9525000" cy="514350"/>
           </a:xfrm>
           <a:prstGeom xmlns:a="http://schemas.openxmlformats.org/drawingml/2006/main" prst="rect">
             <a:avLst/>
@@ -8500,8 +8676,8 @@
           </a:bodyPr>
           <a:lstStyle xmlns:a="http://schemas.openxmlformats.org/drawingml/2006/main"/>
           <a:p xmlns:a="http://schemas.openxmlformats.org/drawingml/2006/main">
-            <a:pPr algn="ctr">
-              <a:defRPr sz="1275" b="1">
+            <a:pPr algn="l">
+              <a:defRPr sz="1350" b="0">
                 <a:solidFill>
                   <a:srgbClr val="17253A"/>
                 </a:solidFill>
@@ -8511,7 +8687,7 @@
               </a:defRPr>
             </a:pPr>
             <a:r>
-              <a:rPr sz="1275" b="1">
+              <a:rPr sz="1350" b="0">
                 <a:solidFill>
                   <a:srgbClr val="17253A"/>
                 </a:solidFill>
@@ -8519,39 +8695,37 @@
                 <a:ea typeface="Arial"/>
                 <a:cs typeface="Arial"/>
               </a:rPr>
-              <a:t>7 × 32 = 224     8 × 32 = 256     9 × 32 = 288</a:t>
-            </a:r>
-          </a:p>
-        </p:txBody>
-      </p:sp>
-      <p:sp>
-        <p:nvSpPr>
-          <p:cNvPr id="16" name="">
-            <a:extLst xmlns:a="http://schemas.openxmlformats.org/drawingml/2006/main">
-              <a:ext uri="{FF2B5EF4-FFF2-40B4-BE49-F238E27FC236}">
-                <a16:creationId xmlns:a16="http://schemas.microsoft.com/office/drawing/2014/main" id="{2AA7C426-A1EC-4502-87E0-32A547CB78E5}"/>
-              </a:ext>
-            </a:extLst>
-          </p:cNvPr>
-          <p:cNvSpPr>
-            <a:spLocks xmlns:a="http://schemas.openxmlformats.org/drawingml/2006/main" noGrp="1"/>
-          </p:cNvSpPr>
-          <p:nvPr/>
-        </p:nvSpPr>
-        <p:spPr>
-          <a:xfrm xmlns:a="http://schemas.openxmlformats.org/drawingml/2006/main">
-            <a:off x="4857750" y="2247900"/>
-            <a:ext cx="6648450" cy="3333750"/>
-          </a:xfrm>
-          <a:prstGeom xmlns:a="http://schemas.openxmlformats.org/drawingml/2006/main" prst="roundRect">
-            <a:avLst>
-              <a:gd name="adj" fmla="val 2286"/>
-            </a:avLst>
+              <a:t>67 - 64 = 3; bring down 4 → 34; choose 32; write 1</a:t>
+            </a:r>
+          </a:p>
+        </p:txBody>
+      </p:sp>
+      <p:sp>
+        <p:nvSpPr>
+          <p:cNvPr id="20" name="">
+            <a:extLst xmlns:a="http://schemas.openxmlformats.org/drawingml/2006/main">
+              <a:ext uri="{FF2B5EF4-FFF2-40B4-BE49-F238E27FC236}">
+                <a16:creationId xmlns:a16="http://schemas.microsoft.com/office/drawing/2014/main" id="{D9387DBC-5147-43F8-AD0A-7AF8653E003E}"/>
+              </a:ext>
+            </a:extLst>
+          </p:cNvPr>
+          <p:cNvSpPr>
+            <a:spLocks xmlns:a="http://schemas.openxmlformats.org/drawingml/2006/main" noGrp="1"/>
+          </p:cNvSpPr>
+          <p:nvPr/>
+        </p:nvSpPr>
+        <p:spPr>
+          <a:xfrm xmlns:a="http://schemas.openxmlformats.org/drawingml/2006/main">
+            <a:off x="1714500" y="3810000"/>
+            <a:ext cx="9334500" cy="9525"/>
+          </a:xfrm>
+          <a:prstGeom xmlns:a="http://schemas.openxmlformats.org/drawingml/2006/main" prst="rect">
+            <a:avLst/>
           </a:prstGeom>
           <a:solidFill xmlns:a="http://schemas.openxmlformats.org/drawingml/2006/main">
-            <a:srgbClr val="E7F1F1"/>
+            <a:srgbClr val="D9E0E6"/>
           </a:solidFill>
-          <a:ln xmlns:a="http://schemas.openxmlformats.org/drawingml/2006/main" w="12383">
+          <a:ln xmlns:a="http://schemas.openxmlformats.org/drawingml/2006/main" w="0">
             <a:solidFill>
               <a:srgbClr val="D9E0E6"/>
             </a:solidFill>
@@ -8560,22 +8734,22 @@
       </p:sp>
       <p:sp>
         <p:nvSpPr>
-          <p:cNvPr id="17" name="">
-            <a:extLst xmlns:a="http://schemas.openxmlformats.org/drawingml/2006/main">
-              <a:ext uri="{FF2B5EF4-FFF2-40B4-BE49-F238E27FC236}">
-                <a16:creationId xmlns:a16="http://schemas.microsoft.com/office/drawing/2014/main" id="{4F0D38E5-4143-45F3-BD5B-03672ED4082F}"/>
-              </a:ext>
-            </a:extLst>
-          </p:cNvPr>
-          <p:cNvSpPr>
-            <a:spLocks xmlns:a="http://schemas.openxmlformats.org/drawingml/2006/main" noGrp="1"/>
-          </p:cNvSpPr>
-          <p:nvPr/>
-        </p:nvSpPr>
-        <p:spPr>
-          <a:xfrm xmlns:a="http://schemas.openxmlformats.org/drawingml/2006/main">
-            <a:off x="5143500" y="2400300"/>
-            <a:ext cx="6096000" cy="590550"/>
+          <p:cNvPr id="21" name="">
+            <a:extLst xmlns:a="http://schemas.openxmlformats.org/drawingml/2006/main">
+              <a:ext uri="{FF2B5EF4-FFF2-40B4-BE49-F238E27FC236}">
+                <a16:creationId xmlns:a16="http://schemas.microsoft.com/office/drawing/2014/main" id="{83A9AB62-424B-41B3-8473-9F070B87771D}"/>
+              </a:ext>
+            </a:extLst>
+          </p:cNvPr>
+          <p:cNvSpPr>
+            <a:spLocks xmlns:a="http://schemas.openxmlformats.org/drawingml/2006/main" noGrp="1"/>
+          </p:cNvSpPr>
+          <p:nvPr/>
+        </p:nvSpPr>
+        <p:spPr>
+          <a:xfrm xmlns:a="http://schemas.openxmlformats.org/drawingml/2006/main">
+            <a:off x="1162050" y="3943350"/>
+            <a:ext cx="400050" cy="400050"/>
           </a:xfrm>
           <a:prstGeom xmlns:a="http://schemas.openxmlformats.org/drawingml/2006/main" prst="rect">
             <a:avLst/>
@@ -8591,10 +8765,10 @@
           </a:bodyPr>
           <a:lstStyle xmlns:a="http://schemas.openxmlformats.org/drawingml/2006/main"/>
           <a:p xmlns:a="http://schemas.openxmlformats.org/drawingml/2006/main">
-            <a:pPr algn="l">
-              <a:defRPr sz="1350" b="0">
-                <a:solidFill>
-                  <a:srgbClr val="17253A"/>
+            <a:pPr algn="ctr">
+              <a:defRPr sz="1125" b="1">
+                <a:solidFill>
+                  <a:srgbClr val="2C6E73"/>
                 </a:solidFill>
                 <a:latin typeface="Arial"/>
                 <a:ea typeface="Arial"/>
@@ -8602,37 +8776,37 @@
               </a:defRPr>
             </a:pPr>
             <a:r>
-              <a:rPr sz="1350" b="0">
-                <a:solidFill>
-                  <a:srgbClr val="17253A"/>
+              <a:rPr sz="1125" b="1">
+                <a:solidFill>
+                  <a:srgbClr val="2C6E73"/>
                 </a:solidFill>
                 <a:latin typeface="Arial"/>
                 <a:ea typeface="Arial"/>
                 <a:cs typeface="Arial"/>
               </a:rPr>
-              <a:t>1. 67 ÷ 32 = 2. Write 2; subtract 64; remainder 3. Bring down 4.</a:t>
-            </a:r>
-          </a:p>
-        </p:txBody>
-      </p:sp>
-      <p:sp>
-        <p:nvSpPr>
-          <p:cNvPr id="18" name="">
-            <a:extLst xmlns:a="http://schemas.openxmlformats.org/drawingml/2006/main">
-              <a:ext uri="{FF2B5EF4-FFF2-40B4-BE49-F238E27FC236}">
-                <a16:creationId xmlns:a16="http://schemas.microsoft.com/office/drawing/2014/main" id="{8D9FF67F-902B-4B02-9586-BA66A95B6B97}"/>
-              </a:ext>
-            </a:extLst>
-          </p:cNvPr>
-          <p:cNvSpPr>
-            <a:spLocks xmlns:a="http://schemas.openxmlformats.org/drawingml/2006/main" noGrp="1"/>
-          </p:cNvSpPr>
-          <p:nvPr/>
-        </p:nvSpPr>
-        <p:spPr>
-          <a:xfrm xmlns:a="http://schemas.openxmlformats.org/drawingml/2006/main">
-            <a:off x="5143500" y="3133725"/>
-            <a:ext cx="6096000" cy="590550"/>
+              <a:t>4</a:t>
+            </a:r>
+          </a:p>
+        </p:txBody>
+      </p:sp>
+      <p:sp>
+        <p:nvSpPr>
+          <p:cNvPr id="22" name="">
+            <a:extLst xmlns:a="http://schemas.openxmlformats.org/drawingml/2006/main">
+              <a:ext uri="{FF2B5EF4-FFF2-40B4-BE49-F238E27FC236}">
+                <a16:creationId xmlns:a16="http://schemas.microsoft.com/office/drawing/2014/main" id="{90FFDA09-3A60-4FBC-81CF-D654783B86DF}"/>
+              </a:ext>
+            </a:extLst>
+          </p:cNvPr>
+          <p:cNvSpPr>
+            <a:spLocks xmlns:a="http://schemas.openxmlformats.org/drawingml/2006/main" noGrp="1"/>
+          </p:cNvSpPr>
+          <p:nvPr/>
+        </p:nvSpPr>
+        <p:spPr>
+          <a:xfrm xmlns:a="http://schemas.openxmlformats.org/drawingml/2006/main">
+            <a:off x="1714500" y="3857625"/>
+            <a:ext cx="9525000" cy="514350"/>
           </a:xfrm>
           <a:prstGeom xmlns:a="http://schemas.openxmlformats.org/drawingml/2006/main" prst="rect">
             <a:avLst/>
@@ -8667,29 +8841,61 @@
                 <a:ea typeface="Arial"/>
                 <a:cs typeface="Arial"/>
               </a:rPr>
-              <a:t>2. 34 ÷ 32 = 1. Write 1; subtract 32; remainder 2. Bring down 5.</a:t>
-            </a:r>
-          </a:p>
-        </p:txBody>
-      </p:sp>
-      <p:sp>
-        <p:nvSpPr>
-          <p:cNvPr id="19" name="">
-            <a:extLst xmlns:a="http://schemas.openxmlformats.org/drawingml/2006/main">
-              <a:ext uri="{FF2B5EF4-FFF2-40B4-BE49-F238E27FC236}">
-                <a16:creationId xmlns:a16="http://schemas.microsoft.com/office/drawing/2014/main" id="{C3602B3D-55A4-4A3D-B2E5-99DD1CCA12CE}"/>
-              </a:ext>
-            </a:extLst>
-          </p:cNvPr>
-          <p:cNvSpPr>
-            <a:spLocks xmlns:a="http://schemas.openxmlformats.org/drawingml/2006/main" noGrp="1"/>
-          </p:cNvSpPr>
-          <p:nvPr/>
-        </p:nvSpPr>
-        <p:spPr>
-          <a:xfrm xmlns:a="http://schemas.openxmlformats.org/drawingml/2006/main">
-            <a:off x="5143500" y="3867150"/>
-            <a:ext cx="6096000" cy="590550"/>
+              <a:t>34 - 32 = 2; bring down 5 → 25; write 0 remainder 25</a:t>
+            </a:r>
+          </a:p>
+        </p:txBody>
+      </p:sp>
+      <p:sp>
+        <p:nvSpPr>
+          <p:cNvPr id="23" name="">
+            <a:extLst xmlns:a="http://schemas.openxmlformats.org/drawingml/2006/main">
+              <a:ext uri="{FF2B5EF4-FFF2-40B4-BE49-F238E27FC236}">
+                <a16:creationId xmlns:a16="http://schemas.microsoft.com/office/drawing/2014/main" id="{7BAC2983-27DF-46AC-8A01-729782278CE9}"/>
+              </a:ext>
+            </a:extLst>
+          </p:cNvPr>
+          <p:cNvSpPr>
+            <a:spLocks xmlns:a="http://schemas.openxmlformats.org/drawingml/2006/main" noGrp="1"/>
+          </p:cNvSpPr>
+          <p:nvPr/>
+        </p:nvSpPr>
+        <p:spPr>
+          <a:xfrm xmlns:a="http://schemas.openxmlformats.org/drawingml/2006/main">
+            <a:off x="1714500" y="4391025"/>
+            <a:ext cx="9334500" cy="9525"/>
+          </a:xfrm>
+          <a:prstGeom xmlns:a="http://schemas.openxmlformats.org/drawingml/2006/main" prst="rect">
+            <a:avLst/>
+          </a:prstGeom>
+          <a:solidFill xmlns:a="http://schemas.openxmlformats.org/drawingml/2006/main">
+            <a:srgbClr val="D9E0E6"/>
+          </a:solidFill>
+          <a:ln xmlns:a="http://schemas.openxmlformats.org/drawingml/2006/main" w="0">
+            <a:solidFill>
+              <a:srgbClr val="D9E0E6"/>
+            </a:solidFill>
+          </a:ln>
+        </p:spPr>
+      </p:sp>
+      <p:sp>
+        <p:nvSpPr>
+          <p:cNvPr id="24" name="">
+            <a:extLst xmlns:a="http://schemas.openxmlformats.org/drawingml/2006/main">
+              <a:ext uri="{FF2B5EF4-FFF2-40B4-BE49-F238E27FC236}">
+                <a16:creationId xmlns:a16="http://schemas.microsoft.com/office/drawing/2014/main" id="{03D368CF-14AF-4461-9C1D-2B532D283292}"/>
+              </a:ext>
+            </a:extLst>
+          </p:cNvPr>
+          <p:cNvSpPr>
+            <a:spLocks xmlns:a="http://schemas.openxmlformats.org/drawingml/2006/main" noGrp="1"/>
+          </p:cNvSpPr>
+          <p:nvPr/>
+        </p:nvSpPr>
+        <p:spPr>
+          <a:xfrm xmlns:a="http://schemas.openxmlformats.org/drawingml/2006/main">
+            <a:off x="1162050" y="4524375"/>
+            <a:ext cx="400050" cy="400050"/>
           </a:xfrm>
           <a:prstGeom xmlns:a="http://schemas.openxmlformats.org/drawingml/2006/main" prst="rect">
             <a:avLst/>
@@ -8705,10 +8911,10 @@
           </a:bodyPr>
           <a:lstStyle xmlns:a="http://schemas.openxmlformats.org/drawingml/2006/main"/>
           <a:p xmlns:a="http://schemas.openxmlformats.org/drawingml/2006/main">
-            <a:pPr algn="l">
-              <a:defRPr sz="1350" b="0">
-                <a:solidFill>
-                  <a:srgbClr val="17253A"/>
+            <a:pPr algn="ctr">
+              <a:defRPr sz="1125" b="1">
+                <a:solidFill>
+                  <a:srgbClr val="2C6E73"/>
                 </a:solidFill>
                 <a:latin typeface="Arial"/>
                 <a:ea typeface="Arial"/>
@@ -8716,37 +8922,37 @@
               </a:defRPr>
             </a:pPr>
             <a:r>
-              <a:rPr sz="1350" b="0">
-                <a:solidFill>
-                  <a:srgbClr val="17253A"/>
+              <a:rPr sz="1125" b="1">
+                <a:solidFill>
+                  <a:srgbClr val="2C6E73"/>
                 </a:solidFill>
                 <a:latin typeface="Arial"/>
                 <a:ea typeface="Arial"/>
                 <a:cs typeface="Arial"/>
               </a:rPr>
-              <a:t>3. 25 ÷ 32 = 0. Write 0; subtract 0; remainder 25.</a:t>
-            </a:r>
-          </a:p>
-        </p:txBody>
-      </p:sp>
-      <p:sp>
-        <p:nvSpPr>
-          <p:cNvPr id="20" name="">
-            <a:extLst xmlns:a="http://schemas.openxmlformats.org/drawingml/2006/main">
-              <a:ext uri="{FF2B5EF4-FFF2-40B4-BE49-F238E27FC236}">
-                <a16:creationId xmlns:a16="http://schemas.microsoft.com/office/drawing/2014/main" id="{1EB16AC0-6B49-43C7-A834-06AD7FF37D66}"/>
-              </a:ext>
-            </a:extLst>
-          </p:cNvPr>
-          <p:cNvSpPr>
-            <a:spLocks xmlns:a="http://schemas.openxmlformats.org/drawingml/2006/main" noGrp="1"/>
-          </p:cNvSpPr>
-          <p:nvPr/>
-        </p:nvSpPr>
-        <p:spPr>
-          <a:xfrm xmlns:a="http://schemas.openxmlformats.org/drawingml/2006/main">
-            <a:off x="5143500" y="4600575"/>
-            <a:ext cx="6096000" cy="590550"/>
+              <a:t>5</a:t>
+            </a:r>
+          </a:p>
+        </p:txBody>
+      </p:sp>
+      <p:sp>
+        <p:nvSpPr>
+          <p:cNvPr id="25" name="">
+            <a:extLst xmlns:a="http://schemas.openxmlformats.org/drawingml/2006/main">
+              <a:ext uri="{FF2B5EF4-FFF2-40B4-BE49-F238E27FC236}">
+                <a16:creationId xmlns:a16="http://schemas.microsoft.com/office/drawing/2014/main" id="{DA2AF2CF-83D9-4C5E-875D-FA3DC6D57119}"/>
+              </a:ext>
+            </a:extLst>
+          </p:cNvPr>
+          <p:cNvSpPr>
+            <a:spLocks xmlns:a="http://schemas.openxmlformats.org/drawingml/2006/main" noGrp="1"/>
+          </p:cNvSpPr>
+          <p:nvPr/>
+        </p:nvSpPr>
+        <p:spPr>
+          <a:xfrm xmlns:a="http://schemas.openxmlformats.org/drawingml/2006/main">
+            <a:off x="1714500" y="4438650"/>
+            <a:ext cx="9525000" cy="514350"/>
           </a:xfrm>
           <a:prstGeom xmlns:a="http://schemas.openxmlformats.org/drawingml/2006/main" prst="rect">
             <a:avLst/>
@@ -8763,9 +8969,9 @@
           <a:lstStyle xmlns:a="http://schemas.openxmlformats.org/drawingml/2006/main"/>
           <a:p xmlns:a="http://schemas.openxmlformats.org/drawingml/2006/main">
             <a:pPr algn="l">
-              <a:defRPr sz="1350" b="1">
-                <a:solidFill>
-                  <a:srgbClr val="2F785D"/>
+              <a:defRPr sz="1350" b="0">
+                <a:solidFill>
+                  <a:srgbClr val="17253A"/>
                 </a:solidFill>
                 <a:latin typeface="Arial"/>
                 <a:ea typeface="Arial"/>
@@ -8773,6 +8979,152 @@
               </a:defRPr>
             </a:pPr>
             <a:r>
+              <a:rPr sz="1350" b="0">
+                <a:solidFill>
+                  <a:srgbClr val="17253A"/>
+                </a:solidFill>
+                <a:latin typeface="Arial"/>
+                <a:ea typeface="Arial"/>
+                <a:cs typeface="Arial"/>
+              </a:rPr>
+              <a:t>Quotient = 210 remainder 25</a:t>
+            </a:r>
+          </a:p>
+        </p:txBody>
+      </p:sp>
+      <p:sp>
+        <p:nvSpPr>
+          <p:cNvPr id="26" name="">
+            <a:extLst xmlns:a="http://schemas.openxmlformats.org/drawingml/2006/main">
+              <a:ext uri="{FF2B5EF4-FFF2-40B4-BE49-F238E27FC236}">
+                <a16:creationId xmlns:a16="http://schemas.microsoft.com/office/drawing/2014/main" id="{E08E8B92-0AE9-47F1-9D01-7A35A5AC047D}"/>
+              </a:ext>
+            </a:extLst>
+          </p:cNvPr>
+          <p:cNvSpPr>
+            <a:spLocks xmlns:a="http://schemas.openxmlformats.org/drawingml/2006/main" noGrp="1"/>
+          </p:cNvSpPr>
+          <p:nvPr/>
+        </p:nvSpPr>
+        <p:spPr>
+          <a:xfrm xmlns:a="http://schemas.openxmlformats.org/drawingml/2006/main">
+            <a:off x="1714500" y="4972050"/>
+            <a:ext cx="9334500" cy="9525"/>
+          </a:xfrm>
+          <a:prstGeom xmlns:a="http://schemas.openxmlformats.org/drawingml/2006/main" prst="rect">
+            <a:avLst/>
+          </a:prstGeom>
+          <a:solidFill xmlns:a="http://schemas.openxmlformats.org/drawingml/2006/main">
+            <a:srgbClr val="D9E0E6"/>
+          </a:solidFill>
+          <a:ln xmlns:a="http://schemas.openxmlformats.org/drawingml/2006/main" w="0">
+            <a:solidFill>
+              <a:srgbClr val="D9E0E6"/>
+            </a:solidFill>
+          </a:ln>
+        </p:spPr>
+      </p:sp>
+      <p:sp>
+        <p:nvSpPr>
+          <p:cNvPr id="27" name="">
+            <a:extLst xmlns:a="http://schemas.openxmlformats.org/drawingml/2006/main">
+              <a:ext uri="{FF2B5EF4-FFF2-40B4-BE49-F238E27FC236}">
+                <a16:creationId xmlns:a16="http://schemas.microsoft.com/office/drawing/2014/main" id="{BC17247D-C393-4639-B7E0-93B1E0CD531B}"/>
+              </a:ext>
+            </a:extLst>
+          </p:cNvPr>
+          <p:cNvSpPr>
+            <a:spLocks xmlns:a="http://schemas.openxmlformats.org/drawingml/2006/main" noGrp="1"/>
+          </p:cNvSpPr>
+          <p:nvPr/>
+        </p:nvSpPr>
+        <p:spPr>
+          <a:xfrm xmlns:a="http://schemas.openxmlformats.org/drawingml/2006/main">
+            <a:off x="1162050" y="5105400"/>
+            <a:ext cx="400050" cy="400050"/>
+          </a:xfrm>
+          <a:prstGeom xmlns:a="http://schemas.openxmlformats.org/drawingml/2006/main" prst="rect">
+            <a:avLst/>
+          </a:prstGeom>
+          <a:noFill xmlns:a="http://schemas.openxmlformats.org/drawingml/2006/main"/>
+          <a:ln xmlns:a="http://schemas.openxmlformats.org/drawingml/2006/main" w="0">
+            <a:noFill/>
+          </a:ln>
+        </p:spPr>
+        <p:txBody>
+          <a:bodyPr xmlns:a="http://schemas.openxmlformats.org/drawingml/2006/main" anchor="ctr">
+            <a:normAutofit fontScale="100000"/>
+          </a:bodyPr>
+          <a:lstStyle xmlns:a="http://schemas.openxmlformats.org/drawingml/2006/main"/>
+          <a:p xmlns:a="http://schemas.openxmlformats.org/drawingml/2006/main">
+            <a:pPr algn="ctr">
+              <a:defRPr sz="1125" b="1">
+                <a:solidFill>
+                  <a:srgbClr val="2F785D"/>
+                </a:solidFill>
+                <a:latin typeface="Arial"/>
+                <a:ea typeface="Arial"/>
+                <a:cs typeface="Arial"/>
+              </a:defRPr>
+            </a:pPr>
+            <a:r>
+              <a:rPr sz="1125" b="1">
+                <a:solidFill>
+                  <a:srgbClr val="2F785D"/>
+                </a:solidFill>
+                <a:latin typeface="Arial"/>
+                <a:ea typeface="Arial"/>
+                <a:cs typeface="Arial"/>
+              </a:rPr>
+              <a:t>6</a:t>
+            </a:r>
+          </a:p>
+        </p:txBody>
+      </p:sp>
+      <p:sp>
+        <p:nvSpPr>
+          <p:cNvPr id="28" name="">
+            <a:extLst xmlns:a="http://schemas.openxmlformats.org/drawingml/2006/main">
+              <a:ext uri="{FF2B5EF4-FFF2-40B4-BE49-F238E27FC236}">
+                <a16:creationId xmlns:a16="http://schemas.microsoft.com/office/drawing/2014/main" id="{D068A801-96A8-41E7-80B2-D54378C4DBFC}"/>
+              </a:ext>
+            </a:extLst>
+          </p:cNvPr>
+          <p:cNvSpPr>
+            <a:spLocks xmlns:a="http://schemas.openxmlformats.org/drawingml/2006/main" noGrp="1"/>
+          </p:cNvSpPr>
+          <p:nvPr/>
+        </p:nvSpPr>
+        <p:spPr>
+          <a:xfrm xmlns:a="http://schemas.openxmlformats.org/drawingml/2006/main">
+            <a:off x="1714500" y="5019675"/>
+            <a:ext cx="9525000" cy="514350"/>
+          </a:xfrm>
+          <a:prstGeom xmlns:a="http://schemas.openxmlformats.org/drawingml/2006/main" prst="rect">
+            <a:avLst/>
+          </a:prstGeom>
+          <a:noFill xmlns:a="http://schemas.openxmlformats.org/drawingml/2006/main"/>
+          <a:ln xmlns:a="http://schemas.openxmlformats.org/drawingml/2006/main" w="0">
+            <a:noFill/>
+          </a:ln>
+        </p:spPr>
+        <p:txBody>
+          <a:bodyPr xmlns:a="http://schemas.openxmlformats.org/drawingml/2006/main" anchor="ctr">
+            <a:normAutofit fontScale="100000"/>
+          </a:bodyPr>
+          <a:lstStyle xmlns:a="http://schemas.openxmlformats.org/drawingml/2006/main"/>
+          <a:p xmlns:a="http://schemas.openxmlformats.org/drawingml/2006/main">
+            <a:pPr algn="l">
+              <a:defRPr sz="1350" b="1">
+                <a:solidFill>
+                  <a:srgbClr val="2F785D"/>
+                </a:solidFill>
+                <a:latin typeface="Arial"/>
+                <a:ea typeface="Arial"/>
+                <a:cs typeface="Arial"/>
+              </a:defRPr>
+            </a:pPr>
+            <a:r>
               <a:rPr sz="1350" b="1">
                 <a:solidFill>
                   <a:srgbClr val="2F785D"/>
@@ -8781,7 +9133,7 @@
                 <a:ea typeface="Arial"/>
                 <a:cs typeface="Arial"/>
               </a:rPr>
-              <a:t>4. Quotient 210 remainder 25. Check: 210 × 32 + 25 = 6745.</a:t>
+              <a:t>25 pupils still need seats, so 211 coaches</a:t>
             </a:r>
           </a:p>
         </p:txBody>
@@ -8789,7 +9141,7 @@
     </p:spTree>
     <p:extLst>
       <p:ext uri="{BB962C8B-B14F-4D97-AF65-F5344CB8AC3E}">
-        <p14:creationId xmlns:p14="http://schemas.microsoft.com/office/powerpoint/2010/main" val="1951426736"/>
+        <p14:creationId xmlns:p14="http://schemas.microsoft.com/office/powerpoint/2010/main" val="1200590716"/>
       </p:ext>
     </p:extLst>
   </p:cSld>
@@ -8917,7 +9269,7 @@
                                           </p:stCondLst>
                                         </p:cTn>
                                         <p:tgtEl>
-                                          <p:spTgt spid="14"/>
+                                          <p:spTgt spid="16"/>
                                         </p:tgtEl>
                                         <p:attrNameLst>
                                           <p:attrName>style.visibility</p:attrName>
@@ -8962,7 +9314,7 @@
                                           </p:stCondLst>
                                         </p:cTn>
                                         <p:tgtEl>
-                                          <p:spTgt spid="15"/>
+                                          <p:spTgt spid="19"/>
                                         </p:tgtEl>
                                         <p:attrNameLst>
                                           <p:attrName>style.visibility</p:attrName>
@@ -9007,7 +9359,7 @@
                                           </p:stCondLst>
                                         </p:cTn>
                                         <p:tgtEl>
-                                          <p:spTgt spid="17"/>
+                                          <p:spTgt spid="22"/>
                                         </p:tgtEl>
                                         <p:attrNameLst>
                                           <p:attrName>style.visibility</p:attrName>
@@ -9052,7 +9404,7 @@
                                           </p:stCondLst>
                                         </p:cTn>
                                         <p:tgtEl>
-                                          <p:spTgt spid="18"/>
+                                          <p:spTgt spid="25"/>
                                         </p:tgtEl>
                                         <p:attrNameLst>
                                           <p:attrName>style.visibility</p:attrName>
@@ -9097,52 +9449,7 @@
                                           </p:stCondLst>
                                         </p:cTn>
                                         <p:tgtEl>
-                                          <p:spTgt spid="19"/>
-                                        </p:tgtEl>
-                                        <p:attrNameLst>
-                                          <p:attrName>style.visibility</p:attrName>
-                                        </p:attrNameLst>
-                                      </p:cBhvr>
-                                      <p:to>
-                                        <p:strVal val="visible"/>
-                                      </p:to>
-                                    </p:set>
-                                  </p:childTnLst>
-                                </p:cTn>
-                              </p:par>
-                            </p:childTnLst>
-                          </p:cTn>
-                        </p:par>
-                      </p:childTnLst>
-                    </p:cTn>
-                  </p:par>
-                  <p:par>
-                    <p:cTn id="31" fill="hold">
-                      <p:stCondLst>
-                        <p:cond delay="indefinite"/>
-                      </p:stCondLst>
-                      <p:childTnLst>
-                        <p:par>
-                          <p:cTn id="32" fill="hold">
-                            <p:stCondLst>
-                              <p:cond delay="0"/>
-                            </p:stCondLst>
-                            <p:childTnLst>
-                              <p:par>
-                                <p:cTn id="33" presetID="1" presetClass="entr" presetSubtype="0" fill="hold" grpId="0" nodeType="clickEffect">
-                                  <p:stCondLst>
-                                    <p:cond delay="0"/>
-                                  </p:stCondLst>
-                                  <p:childTnLst>
-                                    <p:set>
-                                      <p:cBhvr>
-                                        <p:cTn id="34" dur="1" fill="hold">
-                                          <p:stCondLst>
-                                            <p:cond delay="0"/>
-                                          </p:stCondLst>
-                                        </p:cTn>
-                                        <p:tgtEl>
-                                          <p:spTgt spid="20"/>
+                                          <p:spTgt spid="28"/>
                                         </p:tgtEl>
                                         <p:attrNameLst>
                                           <p:attrName>style.visibility</p:attrName>
@@ -9185,12 +9492,11 @@
     <p:bldLst>
       <p:bldP spid="10" grpId="0"/>
       <p:bldP spid="13" grpId="0"/>
-      <p:bldP spid="14" grpId="0"/>
-      <p:bldP spid="15" grpId="0"/>
-      <p:bldP spid="17" grpId="0"/>
-      <p:bldP spid="18" grpId="0"/>
+      <p:bldP spid="16" grpId="0"/>
       <p:bldP spid="19" grpId="0"/>
-      <p:bldP spid="20" grpId="0"/>
+      <p:bldP spid="22" grpId="0"/>
+      <p:bldP spid="25" grpId="0"/>
+      <p:bldP spid="28" grpId="0"/>
     </p:bldLst>
   </p:timing>
 </p:sld>
@@ -9220,7 +9526,7 @@
           <p:cNvPr id="15" name="">
             <a:extLst xmlns:a="http://schemas.openxmlformats.org/drawingml/2006/main">
               <a:ext uri="{FF2B5EF4-FFF2-40B4-BE49-F238E27FC236}">
-                <a16:creationId xmlns:a16="http://schemas.microsoft.com/office/drawing/2014/main" id="{FF19D472-19F5-4DE0-8EFF-813B3B154EF8}"/>
+                <a16:creationId xmlns:a16="http://schemas.microsoft.com/office/drawing/2014/main" id="{8652141B-DA8A-4D74-BACE-A28F5A06437F}"/>
               </a:ext>
             </a:extLst>
           </p:cNvPr>
@@ -9252,7 +9558,7 @@
           <p:cNvPr id="2" name="">
             <a:extLst xmlns:a="http://schemas.openxmlformats.org/drawingml/2006/main">
               <a:ext uri="{FF2B5EF4-FFF2-40B4-BE49-F238E27FC236}">
-                <a16:creationId xmlns:a16="http://schemas.microsoft.com/office/drawing/2014/main" id="{04A34C1C-5BF6-4102-800F-D3A53849AD5E}"/>
+                <a16:creationId xmlns:a16="http://schemas.microsoft.com/office/drawing/2014/main" id="{5DE16944-5693-4B51-9F46-C4D826A51BE8}"/>
               </a:ext>
             </a:extLst>
           </p:cNvPr>
@@ -9309,7 +9615,7 @@
           <p:cNvPr id="3" name="">
             <a:extLst xmlns:a="http://schemas.openxmlformats.org/drawingml/2006/main">
               <a:ext uri="{FF2B5EF4-FFF2-40B4-BE49-F238E27FC236}">
-                <a16:creationId xmlns:a16="http://schemas.microsoft.com/office/drawing/2014/main" id="{1E09C8E2-E56F-48C9-BF74-EF13EFE384E3}"/>
+                <a16:creationId xmlns:a16="http://schemas.microsoft.com/office/drawing/2014/main" id="{B9209928-3EDC-4C73-9D74-AFF817F819E0}"/>
               </a:ext>
             </a:extLst>
           </p:cNvPr>
@@ -9341,7 +9647,7 @@
           <p:cNvPr id="4" name="">
             <a:extLst xmlns:a="http://schemas.openxmlformats.org/drawingml/2006/main">
               <a:ext uri="{FF2B5EF4-FFF2-40B4-BE49-F238E27FC236}">
-                <a16:creationId xmlns:a16="http://schemas.microsoft.com/office/drawing/2014/main" id="{8E1796BA-46DE-4217-9AFC-3598FD311F92}"/>
+                <a16:creationId xmlns:a16="http://schemas.microsoft.com/office/drawing/2014/main" id="{62CB6FD6-C3F8-49A9-8B7C-DA38BA386EF2}"/>
               </a:ext>
             </a:extLst>
           </p:cNvPr>
@@ -9398,7 +9704,7 @@
           <p:cNvPr id="5" name="">
             <a:extLst xmlns:a="http://schemas.openxmlformats.org/drawingml/2006/main">
               <a:ext uri="{FF2B5EF4-FFF2-40B4-BE49-F238E27FC236}">
-                <a16:creationId xmlns:a16="http://schemas.microsoft.com/office/drawing/2014/main" id="{13BAD62E-CB47-42B8-877D-35D5348BA2FC}"/>
+                <a16:creationId xmlns:a16="http://schemas.microsoft.com/office/drawing/2014/main" id="{5C5D2E58-0DCB-41F7-B634-1C2B88EFE126}"/>
               </a:ext>
             </a:extLst>
           </p:cNvPr>
@@ -9455,7 +9761,7 @@
           <p:cNvPr id="6" name="">
             <a:extLst xmlns:a="http://schemas.openxmlformats.org/drawingml/2006/main">
               <a:ext uri="{FF2B5EF4-FFF2-40B4-BE49-F238E27FC236}">
-                <a16:creationId xmlns:a16="http://schemas.microsoft.com/office/drawing/2014/main" id="{124FCC66-9596-494A-9D49-78BBD224724E}"/>
+                <a16:creationId xmlns:a16="http://schemas.microsoft.com/office/drawing/2014/main" id="{A98B21EB-AA0A-4CD6-86D6-9C5E3F3EBE2D}"/>
               </a:ext>
             </a:extLst>
           </p:cNvPr>
@@ -9512,7 +9818,7 @@
           <p:cNvPr id="7" name="">
             <a:extLst xmlns:a="http://schemas.openxmlformats.org/drawingml/2006/main">
               <a:ext uri="{FF2B5EF4-FFF2-40B4-BE49-F238E27FC236}">
-                <a16:creationId xmlns:a16="http://schemas.microsoft.com/office/drawing/2014/main" id="{B473A81F-1D23-47FA-9313-CFB8EB6DC217}"/>
+                <a16:creationId xmlns:a16="http://schemas.microsoft.com/office/drawing/2014/main" id="{DD5DD16B-FDD3-48B3-BA06-6E266279B62B}"/>
               </a:ext>
             </a:extLst>
           </p:cNvPr>
@@ -9544,7 +9850,7 @@
           <p:cNvPr id="8" name="">
             <a:extLst xmlns:a="http://schemas.openxmlformats.org/drawingml/2006/main">
               <a:ext uri="{FF2B5EF4-FFF2-40B4-BE49-F238E27FC236}">
-                <a16:creationId xmlns:a16="http://schemas.microsoft.com/office/drawing/2014/main" id="{FDD98720-DC7B-4B50-8099-3F52042226DE}"/>
+                <a16:creationId xmlns:a16="http://schemas.microsoft.com/office/drawing/2014/main" id="{3B46DC39-FFBC-45EE-80AB-1C8B85D1D852}"/>
               </a:ext>
             </a:extLst>
           </p:cNvPr>
@@ -9601,7 +9907,7 @@
           <p:cNvPr id="9" name="">
             <a:extLst xmlns:a="http://schemas.openxmlformats.org/drawingml/2006/main">
               <a:ext uri="{FF2B5EF4-FFF2-40B4-BE49-F238E27FC236}">
-                <a16:creationId xmlns:a16="http://schemas.microsoft.com/office/drawing/2014/main" id="{60D41CCA-1418-464D-8875-44C51308297F}"/>
+                <a16:creationId xmlns:a16="http://schemas.microsoft.com/office/drawing/2014/main" id="{554586F0-A23B-42FE-A0AA-9964EA1EA600}"/>
               </a:ext>
             </a:extLst>
           </p:cNvPr>
@@ -9658,7 +9964,7 @@
           <p:cNvPr id="10" name="">
             <a:extLst xmlns:a="http://schemas.openxmlformats.org/drawingml/2006/main">
               <a:ext uri="{FF2B5EF4-FFF2-40B4-BE49-F238E27FC236}">
-                <a16:creationId xmlns:a16="http://schemas.microsoft.com/office/drawing/2014/main" id="{9E8CC72B-292A-4D63-A3BF-A7C11CE39DB1}"/>
+                <a16:creationId xmlns:a16="http://schemas.microsoft.com/office/drawing/2014/main" id="{255FB94A-B90D-47E9-A04F-8DAF8CCB8909}"/>
               </a:ext>
             </a:extLst>
           </p:cNvPr>
@@ -9715,7 +10021,7 @@
           <p:cNvPr id="11" name="">
             <a:extLst xmlns:a="http://schemas.openxmlformats.org/drawingml/2006/main">
               <a:ext uri="{FF2B5EF4-FFF2-40B4-BE49-F238E27FC236}">
-                <a16:creationId xmlns:a16="http://schemas.microsoft.com/office/drawing/2014/main" id="{C5612997-813E-4CD4-BB8E-E0EEDC60EA14}"/>
+                <a16:creationId xmlns:a16="http://schemas.microsoft.com/office/drawing/2014/main" id="{86685679-6079-40E3-AB58-464E6DEA0DF3}"/>
               </a:ext>
             </a:extLst>
           </p:cNvPr>
@@ -9772,7 +10078,7 @@
           <p:cNvPr id="12" name="">
             <a:extLst xmlns:a="http://schemas.openxmlformats.org/drawingml/2006/main">
               <a:ext uri="{FF2B5EF4-FFF2-40B4-BE49-F238E27FC236}">
-                <a16:creationId xmlns:a16="http://schemas.microsoft.com/office/drawing/2014/main" id="{BA95FB2A-9D63-4EA9-B56D-B44E55A34F83}"/>
+                <a16:creationId xmlns:a16="http://schemas.microsoft.com/office/drawing/2014/main" id="{0D3647DE-6EC6-471C-B4B7-CC409D00CCDF}"/>
               </a:ext>
             </a:extLst>
           </p:cNvPr>
@@ -9804,7 +10110,7 @@
           <p:cNvPr id="13" name="">
             <a:extLst xmlns:a="http://schemas.openxmlformats.org/drawingml/2006/main">
               <a:ext uri="{FF2B5EF4-FFF2-40B4-BE49-F238E27FC236}">
-                <a16:creationId xmlns:a16="http://schemas.microsoft.com/office/drawing/2014/main" id="{A532DA5F-E736-4F2C-92EA-B8349F54D594}"/>
+                <a16:creationId xmlns:a16="http://schemas.microsoft.com/office/drawing/2014/main" id="{5525DB1B-2607-4B14-8AAF-B8B54904136F}"/>
               </a:ext>
             </a:extLst>
           </p:cNvPr>
@@ -9861,7 +10167,7 @@
           <p:cNvPr id="14" name="">
             <a:extLst xmlns:a="http://schemas.openxmlformats.org/drawingml/2006/main">
               <a:ext uri="{FF2B5EF4-FFF2-40B4-BE49-F238E27FC236}">
-                <a16:creationId xmlns:a16="http://schemas.microsoft.com/office/drawing/2014/main" id="{A20B05EE-C8CB-4A9E-AE7A-E9C7C632D0B8}"/>
+                <a16:creationId xmlns:a16="http://schemas.microsoft.com/office/drawing/2014/main" id="{F84ED773-5DF6-4412-AFA2-7CB26FE8D36A}"/>
               </a:ext>
             </a:extLst>
           </p:cNvPr>
@@ -9916,7 +10222,7 @@
     </p:spTree>
     <p:extLst>
       <p:ext uri="{BB962C8B-B14F-4D97-AF65-F5344CB8AC3E}">
-        <p14:creationId xmlns:p14="http://schemas.microsoft.com/office/powerpoint/2010/main" val="1813859784"/>
+        <p14:creationId xmlns:p14="http://schemas.microsoft.com/office/powerpoint/2010/main" val="1989403935"/>
       </p:ext>
     </p:extLst>
   </p:cSld>
@@ -10117,7 +10423,7 @@
           <p:cNvPr id="16" name="">
             <a:extLst xmlns:a="http://schemas.openxmlformats.org/drawingml/2006/main">
               <a:ext uri="{FF2B5EF4-FFF2-40B4-BE49-F238E27FC236}">
-                <a16:creationId xmlns:a16="http://schemas.microsoft.com/office/drawing/2014/main" id="{A17ADB3B-FCB9-400F-9579-071CD9393FEF}"/>
+                <a16:creationId xmlns:a16="http://schemas.microsoft.com/office/drawing/2014/main" id="{2C1C0A0C-5617-4047-B39B-8D40D3C087CC}"/>
               </a:ext>
             </a:extLst>
           </p:cNvPr>
@@ -10149,7 +10455,7 @@
           <p:cNvPr id="2" name="">
             <a:extLst xmlns:a="http://schemas.openxmlformats.org/drawingml/2006/main">
               <a:ext uri="{FF2B5EF4-FFF2-40B4-BE49-F238E27FC236}">
-                <a16:creationId xmlns:a16="http://schemas.microsoft.com/office/drawing/2014/main" id="{17ABBEF0-C99A-4BF3-8F86-AF2FCFC7E814}"/>
+                <a16:creationId xmlns:a16="http://schemas.microsoft.com/office/drawing/2014/main" id="{94124F63-1846-409D-803C-47D3A9495D12}"/>
               </a:ext>
             </a:extLst>
           </p:cNvPr>
@@ -10206,7 +10512,7 @@
           <p:cNvPr id="3" name="">
             <a:extLst xmlns:a="http://schemas.openxmlformats.org/drawingml/2006/main">
               <a:ext uri="{FF2B5EF4-FFF2-40B4-BE49-F238E27FC236}">
-                <a16:creationId xmlns:a16="http://schemas.microsoft.com/office/drawing/2014/main" id="{230D8E7C-108D-4AC9-BAD2-16AC8A836A9D}"/>
+                <a16:creationId xmlns:a16="http://schemas.microsoft.com/office/drawing/2014/main" id="{D9D0D4D1-4C30-4EB6-B902-BD98752B3691}"/>
               </a:ext>
             </a:extLst>
           </p:cNvPr>
@@ -10238,7 +10544,7 @@
           <p:cNvPr id="4" name="">
             <a:extLst xmlns:a="http://schemas.openxmlformats.org/drawingml/2006/main">
               <a:ext uri="{FF2B5EF4-FFF2-40B4-BE49-F238E27FC236}">
-                <a16:creationId xmlns:a16="http://schemas.microsoft.com/office/drawing/2014/main" id="{D29E53C8-9E9C-497D-92CB-7B690378D6D0}"/>
+                <a16:creationId xmlns:a16="http://schemas.microsoft.com/office/drawing/2014/main" id="{770E33EB-E933-4C21-802F-A5E340121189}"/>
               </a:ext>
             </a:extLst>
           </p:cNvPr>
@@ -10295,7 +10601,7 @@
           <p:cNvPr id="5" name="">
             <a:extLst xmlns:a="http://schemas.openxmlformats.org/drawingml/2006/main">
               <a:ext uri="{FF2B5EF4-FFF2-40B4-BE49-F238E27FC236}">
-                <a16:creationId xmlns:a16="http://schemas.microsoft.com/office/drawing/2014/main" id="{92582CA8-686D-480D-BCAA-C3E5BDDB767E}"/>
+                <a16:creationId xmlns:a16="http://schemas.microsoft.com/office/drawing/2014/main" id="{E7210EF3-0CF8-41F1-B4D4-AEC227231935}"/>
               </a:ext>
             </a:extLst>
           </p:cNvPr>
@@ -10352,7 +10658,7 @@
           <p:cNvPr id="6" name="">
             <a:extLst xmlns:a="http://schemas.openxmlformats.org/drawingml/2006/main">
               <a:ext uri="{FF2B5EF4-FFF2-40B4-BE49-F238E27FC236}">
-                <a16:creationId xmlns:a16="http://schemas.microsoft.com/office/drawing/2014/main" id="{1B63C682-377F-44AE-9AAB-2A664620F94F}"/>
+                <a16:creationId xmlns:a16="http://schemas.microsoft.com/office/drawing/2014/main" id="{80E7854D-F759-41E5-AC45-37D1134C03C1}"/>
               </a:ext>
             </a:extLst>
           </p:cNvPr>
@@ -10409,7 +10715,7 @@
           <p:cNvPr id="7" name="">
             <a:extLst xmlns:a="http://schemas.openxmlformats.org/drawingml/2006/main">
               <a:ext uri="{FF2B5EF4-FFF2-40B4-BE49-F238E27FC236}">
-                <a16:creationId xmlns:a16="http://schemas.microsoft.com/office/drawing/2014/main" id="{3B8F0694-76D8-4493-82B9-85B3F7A46A13}"/>
+                <a16:creationId xmlns:a16="http://schemas.microsoft.com/office/drawing/2014/main" id="{519A369D-BC4F-419E-A169-6FE6F6918D4D}"/>
               </a:ext>
             </a:extLst>
           </p:cNvPr>
@@ -10441,7 +10747,7 @@
           <p:cNvPr id="8" name="">
             <a:extLst xmlns:a="http://schemas.openxmlformats.org/drawingml/2006/main">
               <a:ext uri="{FF2B5EF4-FFF2-40B4-BE49-F238E27FC236}">
-                <a16:creationId xmlns:a16="http://schemas.microsoft.com/office/drawing/2014/main" id="{814A0E68-913C-4A02-9656-46ADA1D15C16}"/>
+                <a16:creationId xmlns:a16="http://schemas.microsoft.com/office/drawing/2014/main" id="{C6A0360D-294D-4ED7-BF76-0046F82DE5BB}"/>
               </a:ext>
             </a:extLst>
           </p:cNvPr>
@@ -10498,7 +10804,7 @@
           <p:cNvPr id="9" name="">
             <a:extLst xmlns:a="http://schemas.openxmlformats.org/drawingml/2006/main">
               <a:ext uri="{FF2B5EF4-FFF2-40B4-BE49-F238E27FC236}">
-                <a16:creationId xmlns:a16="http://schemas.microsoft.com/office/drawing/2014/main" id="{C44C93A0-FE3D-4368-B43B-1CE87C0C4D06}"/>
+                <a16:creationId xmlns:a16="http://schemas.microsoft.com/office/drawing/2014/main" id="{EAA9F6E5-7BDA-4DFD-BC11-68101150CB05}"/>
               </a:ext>
             </a:extLst>
           </p:cNvPr>
@@ -10555,7 +10861,7 @@
           <p:cNvPr id="10" name="">
             <a:extLst xmlns:a="http://schemas.openxmlformats.org/drawingml/2006/main">
               <a:ext uri="{FF2B5EF4-FFF2-40B4-BE49-F238E27FC236}">
-                <a16:creationId xmlns:a16="http://schemas.microsoft.com/office/drawing/2014/main" id="{03838B46-E200-4F22-8D71-8A29F813D4F9}"/>
+                <a16:creationId xmlns:a16="http://schemas.microsoft.com/office/drawing/2014/main" id="{C7A14731-00E0-475C-BB3B-AD4919C719D5}"/>
               </a:ext>
             </a:extLst>
           </p:cNvPr>
@@ -10612,7 +10918,7 @@
           <p:cNvPr id="11" name="">
             <a:extLst xmlns:a="http://schemas.openxmlformats.org/drawingml/2006/main">
               <a:ext uri="{FF2B5EF4-FFF2-40B4-BE49-F238E27FC236}">
-                <a16:creationId xmlns:a16="http://schemas.microsoft.com/office/drawing/2014/main" id="{31E4158D-B56B-479A-9E63-E505024EC184}"/>
+                <a16:creationId xmlns:a16="http://schemas.microsoft.com/office/drawing/2014/main" id="{B3786147-4876-4CAE-A869-7F890F06500E}"/>
               </a:ext>
             </a:extLst>
           </p:cNvPr>
@@ -10669,7 +10975,7 @@
           <p:cNvPr id="12" name="">
             <a:extLst xmlns:a="http://schemas.openxmlformats.org/drawingml/2006/main">
               <a:ext uri="{FF2B5EF4-FFF2-40B4-BE49-F238E27FC236}">
-                <a16:creationId xmlns:a16="http://schemas.microsoft.com/office/drawing/2014/main" id="{AA710D13-C3A2-43D6-B92A-E99971E77772}"/>
+                <a16:creationId xmlns:a16="http://schemas.microsoft.com/office/drawing/2014/main" id="{616D0A86-D4C7-4523-A3B6-4897BA19363E}"/>
               </a:ext>
             </a:extLst>
           </p:cNvPr>
@@ -10726,7 +11032,7 @@
           <p:cNvPr id="13" name="">
             <a:extLst xmlns:a="http://schemas.openxmlformats.org/drawingml/2006/main">
               <a:ext uri="{FF2B5EF4-FFF2-40B4-BE49-F238E27FC236}">
-                <a16:creationId xmlns:a16="http://schemas.microsoft.com/office/drawing/2014/main" id="{826B51A4-7495-4118-B92F-5F52B1F74209}"/>
+                <a16:creationId xmlns:a16="http://schemas.microsoft.com/office/drawing/2014/main" id="{736AE7BB-32FA-4F5B-A5DB-F5D00126277A}"/>
               </a:ext>
             </a:extLst>
           </p:cNvPr>
@@ -10783,7 +11089,7 @@
           <p:cNvPr id="14" name="">
             <a:extLst xmlns:a="http://schemas.openxmlformats.org/drawingml/2006/main">
               <a:ext uri="{FF2B5EF4-FFF2-40B4-BE49-F238E27FC236}">
-                <a16:creationId xmlns:a16="http://schemas.microsoft.com/office/drawing/2014/main" id="{1343660A-60E4-40A3-B5B2-8214B60A3129}"/>
+                <a16:creationId xmlns:a16="http://schemas.microsoft.com/office/drawing/2014/main" id="{20365E08-EA13-4AD0-A2B8-0D2311F9EB83}"/>
               </a:ext>
             </a:extLst>
           </p:cNvPr>
@@ -10840,7 +11146,7 @@
           <p:cNvPr id="15" name="">
             <a:extLst xmlns:a="http://schemas.openxmlformats.org/drawingml/2006/main">
               <a:ext uri="{FF2B5EF4-FFF2-40B4-BE49-F238E27FC236}">
-                <a16:creationId xmlns:a16="http://schemas.microsoft.com/office/drawing/2014/main" id="{7054B368-2E70-45C6-98FC-0B0EB0AA869D}"/>
+                <a16:creationId xmlns:a16="http://schemas.microsoft.com/office/drawing/2014/main" id="{CFEFBDC3-7D79-4BEF-BA5B-5EA86EDE5D8E}"/>
               </a:ext>
             </a:extLst>
           </p:cNvPr>
@@ -10895,7 +11201,7 @@
     </p:spTree>
     <p:extLst>
       <p:ext uri="{BB962C8B-B14F-4D97-AF65-F5344CB8AC3E}">
-        <p14:creationId xmlns:p14="http://schemas.microsoft.com/office/powerpoint/2010/main" val="2065167813"/>
+        <p14:creationId xmlns:p14="http://schemas.microsoft.com/office/powerpoint/2010/main" val="935940621"/>
       </p:ext>
     </p:extLst>
   </p:cSld>
@@ -11050,7 +11356,7 @@
           <p:cNvPr id="16" name="">
             <a:extLst xmlns:a="http://schemas.openxmlformats.org/drawingml/2006/main">
               <a:ext uri="{FF2B5EF4-FFF2-40B4-BE49-F238E27FC236}">
-                <a16:creationId xmlns:a16="http://schemas.microsoft.com/office/drawing/2014/main" id="{B4E273DB-C4F4-4BFF-9A76-079E156A9283}"/>
+                <a16:creationId xmlns:a16="http://schemas.microsoft.com/office/drawing/2014/main" id="{43A9B352-1E15-46BD-8C4E-F9384DA2E684}"/>
               </a:ext>
             </a:extLst>
           </p:cNvPr>
@@ -11082,7 +11388,7 @@
           <p:cNvPr id="2" name="">
             <a:extLst xmlns:a="http://schemas.openxmlformats.org/drawingml/2006/main">
               <a:ext uri="{FF2B5EF4-FFF2-40B4-BE49-F238E27FC236}">
-                <a16:creationId xmlns:a16="http://schemas.microsoft.com/office/drawing/2014/main" id="{47B21C1B-4DB6-468D-828E-C1EA813B124A}"/>
+                <a16:creationId xmlns:a16="http://schemas.microsoft.com/office/drawing/2014/main" id="{0E3478E0-AF26-4281-8114-79AC66EFAE35}"/>
               </a:ext>
             </a:extLst>
           </p:cNvPr>
@@ -11139,7 +11445,7 @@
           <p:cNvPr id="3" name="">
             <a:extLst xmlns:a="http://schemas.openxmlformats.org/drawingml/2006/main">
               <a:ext uri="{FF2B5EF4-FFF2-40B4-BE49-F238E27FC236}">
-                <a16:creationId xmlns:a16="http://schemas.microsoft.com/office/drawing/2014/main" id="{001F70EA-624D-46C9-8403-D9F5414AC1F6}"/>
+                <a16:creationId xmlns:a16="http://schemas.microsoft.com/office/drawing/2014/main" id="{E97357C7-EC9E-474B-8D8B-069541BDD315}"/>
               </a:ext>
             </a:extLst>
           </p:cNvPr>
@@ -11171,7 +11477,7 @@
           <p:cNvPr id="4" name="">
             <a:extLst xmlns:a="http://schemas.openxmlformats.org/drawingml/2006/main">
               <a:ext uri="{FF2B5EF4-FFF2-40B4-BE49-F238E27FC236}">
-                <a16:creationId xmlns:a16="http://schemas.microsoft.com/office/drawing/2014/main" id="{1B0D7E74-B7E0-41E8-8502-D9B141ECBC1A}"/>
+                <a16:creationId xmlns:a16="http://schemas.microsoft.com/office/drawing/2014/main" id="{FD0A44B2-CF7C-47EB-AE18-189AE0FCA916}"/>
               </a:ext>
             </a:extLst>
           </p:cNvPr>
@@ -11228,7 +11534,7 @@
           <p:cNvPr id="5" name="">
             <a:extLst xmlns:a="http://schemas.openxmlformats.org/drawingml/2006/main">
               <a:ext uri="{FF2B5EF4-FFF2-40B4-BE49-F238E27FC236}">
-                <a16:creationId xmlns:a16="http://schemas.microsoft.com/office/drawing/2014/main" id="{4880A4BD-D732-4FA5-A906-A60BC92B2E34}"/>
+                <a16:creationId xmlns:a16="http://schemas.microsoft.com/office/drawing/2014/main" id="{1DC3D602-9AC1-4121-AE1A-B2A4B7817933}"/>
               </a:ext>
             </a:extLst>
           </p:cNvPr>
@@ -11285,7 +11591,7 @@
           <p:cNvPr id="6" name="">
             <a:extLst xmlns:a="http://schemas.openxmlformats.org/drawingml/2006/main">
               <a:ext uri="{FF2B5EF4-FFF2-40B4-BE49-F238E27FC236}">
-                <a16:creationId xmlns:a16="http://schemas.microsoft.com/office/drawing/2014/main" id="{C80AF6F8-1A68-4F4C-B62C-AAD6F15FBFF6}"/>
+                <a16:creationId xmlns:a16="http://schemas.microsoft.com/office/drawing/2014/main" id="{855DCD74-B621-4D7C-A797-23C711A7AE2E}"/>
               </a:ext>
             </a:extLst>
           </p:cNvPr>
@@ -11342,7 +11648,7 @@
           <p:cNvPr id="7" name="">
             <a:extLst xmlns:a="http://schemas.openxmlformats.org/drawingml/2006/main">
               <a:ext uri="{FF2B5EF4-FFF2-40B4-BE49-F238E27FC236}">
-                <a16:creationId xmlns:a16="http://schemas.microsoft.com/office/drawing/2014/main" id="{3F18D14B-10BA-46B8-952A-47CA39D1637E}"/>
+                <a16:creationId xmlns:a16="http://schemas.microsoft.com/office/drawing/2014/main" id="{C5F2E3CF-B175-434C-9C95-09F13E1950D8}"/>
               </a:ext>
             </a:extLst>
           </p:cNvPr>
@@ -11374,7 +11680,7 @@
           <p:cNvPr id="8" name="">
             <a:extLst xmlns:a="http://schemas.openxmlformats.org/drawingml/2006/main">
               <a:ext uri="{FF2B5EF4-FFF2-40B4-BE49-F238E27FC236}">
-                <a16:creationId xmlns:a16="http://schemas.microsoft.com/office/drawing/2014/main" id="{9BEB3AD6-8909-4B74-972E-1D4153D3CA84}"/>
+                <a16:creationId xmlns:a16="http://schemas.microsoft.com/office/drawing/2014/main" id="{4FE9F201-CCB3-48E4-BAF0-E9C535DB98CB}"/>
               </a:ext>
             </a:extLst>
           </p:cNvPr>
@@ -11431,7 +11737,7 @@
           <p:cNvPr id="9" name="">
             <a:extLst xmlns:a="http://schemas.openxmlformats.org/drawingml/2006/main">
               <a:ext uri="{FF2B5EF4-FFF2-40B4-BE49-F238E27FC236}">
-                <a16:creationId xmlns:a16="http://schemas.microsoft.com/office/drawing/2014/main" id="{160BA3FD-4ECB-46A4-92B3-BA02E0DF092B}"/>
+                <a16:creationId xmlns:a16="http://schemas.microsoft.com/office/drawing/2014/main" id="{6386747C-B8F6-4F8A-8578-0D47EEE57124}"/>
               </a:ext>
             </a:extLst>
           </p:cNvPr>
@@ -11492,7 +11798,7 @@
           <p:nvPr/>
         </p:nvPicPr>
         <p:blipFill>
-          <a:blip xmlns:r="http://schemas.openxmlformats.org/officeDocument/2006/relationships" xmlns:a="http://schemas.openxmlformats.org/drawingml/2006/main" r:embed="R5d1bb30a53294802"/>
+          <a:blip xmlns:r="http://schemas.openxmlformats.org/officeDocument/2006/relationships" xmlns:a="http://schemas.openxmlformats.org/drawingml/2006/main" r:embed="Rf4f6c4d7b59d4c6a"/>
           <a:stretch xmlns:a="http://schemas.openxmlformats.org/drawingml/2006/main"/>
         </p:blipFill>
         <p:spPr>
@@ -11510,7 +11816,7 @@
           <p:cNvPr id="11" name="">
             <a:extLst xmlns:a="http://schemas.openxmlformats.org/drawingml/2006/main">
               <a:ext uri="{FF2B5EF4-FFF2-40B4-BE49-F238E27FC236}">
-                <a16:creationId xmlns:a16="http://schemas.microsoft.com/office/drawing/2014/main" id="{83762771-F3EF-48BF-AE41-FA01E20A57AA}"/>
+                <a16:creationId xmlns:a16="http://schemas.microsoft.com/office/drawing/2014/main" id="{AD1025CF-5D33-4EE7-A527-6DD046621CF9}"/>
               </a:ext>
             </a:extLst>
           </p:cNvPr>
@@ -11567,7 +11873,7 @@
           <p:cNvPr id="12" name="">
             <a:extLst xmlns:a="http://schemas.openxmlformats.org/drawingml/2006/main">
               <a:ext uri="{FF2B5EF4-FFF2-40B4-BE49-F238E27FC236}">
-                <a16:creationId xmlns:a16="http://schemas.microsoft.com/office/drawing/2014/main" id="{4B89DC14-6EA1-4982-82CD-A07C9B48EC9C}"/>
+                <a16:creationId xmlns:a16="http://schemas.microsoft.com/office/drawing/2014/main" id="{AA114B49-0D53-4C2B-82F8-31E657866474}"/>
               </a:ext>
             </a:extLst>
           </p:cNvPr>
@@ -11624,7 +11930,7 @@
           <p:cNvPr id="13" name="">
             <a:extLst xmlns:a="http://schemas.openxmlformats.org/drawingml/2006/main">
               <a:ext uri="{FF2B5EF4-FFF2-40B4-BE49-F238E27FC236}">
-                <a16:creationId xmlns:a16="http://schemas.microsoft.com/office/drawing/2014/main" id="{DAECFB7E-941B-4370-A9F0-49DD30D799F9}"/>
+                <a16:creationId xmlns:a16="http://schemas.microsoft.com/office/drawing/2014/main" id="{6EBDEE6B-05F6-456C-B1FD-CBC6DF766F05}"/>
               </a:ext>
             </a:extLst>
           </p:cNvPr>
@@ -11656,7 +11962,7 @@
           <p:cNvPr id="14" name="">
             <a:extLst xmlns:a="http://schemas.openxmlformats.org/drawingml/2006/main">
               <a:ext uri="{FF2B5EF4-FFF2-40B4-BE49-F238E27FC236}">
-                <a16:creationId xmlns:a16="http://schemas.microsoft.com/office/drawing/2014/main" id="{6B241F86-02C3-4430-AEDF-4712A0655F2D}"/>
+                <a16:creationId xmlns:a16="http://schemas.microsoft.com/office/drawing/2014/main" id="{AC020642-9076-41F8-904E-6F11CD41BC5C}"/>
               </a:ext>
             </a:extLst>
           </p:cNvPr>
@@ -11713,7 +12019,7 @@
           <p:cNvPr id="15" name="">
             <a:extLst xmlns:a="http://schemas.openxmlformats.org/drawingml/2006/main">
               <a:ext uri="{FF2B5EF4-FFF2-40B4-BE49-F238E27FC236}">
-                <a16:creationId xmlns:a16="http://schemas.microsoft.com/office/drawing/2014/main" id="{BD48A757-E4BC-4095-B7AD-3552290A8C63}"/>
+                <a16:creationId xmlns:a16="http://schemas.microsoft.com/office/drawing/2014/main" id="{B0DC23E3-2196-4701-AE83-C4B30F09ADFF}"/>
               </a:ext>
             </a:extLst>
           </p:cNvPr>
@@ -11768,7 +12074,7 @@
     </p:spTree>
     <p:extLst>
       <p:ext uri="{BB962C8B-B14F-4D97-AF65-F5344CB8AC3E}">
-        <p14:creationId xmlns:p14="http://schemas.microsoft.com/office/powerpoint/2010/main" val="640230241"/>
+        <p14:creationId xmlns:p14="http://schemas.microsoft.com/office/powerpoint/2010/main" val="566966464"/>
       </p:ext>
     </p:extLst>
   </p:cSld>
@@ -11923,7 +12229,7 @@
           <p:cNvPr id="23" name="">
             <a:extLst xmlns:a="http://schemas.openxmlformats.org/drawingml/2006/main">
               <a:ext uri="{FF2B5EF4-FFF2-40B4-BE49-F238E27FC236}">
-                <a16:creationId xmlns:a16="http://schemas.microsoft.com/office/drawing/2014/main" id="{063DCA96-C892-44E1-ADDA-219EF3C0B0C0}"/>
+                <a16:creationId xmlns:a16="http://schemas.microsoft.com/office/drawing/2014/main" id="{53891D09-D625-447E-BC22-E576F4B40ECC}"/>
               </a:ext>
             </a:extLst>
           </p:cNvPr>
@@ -11955,7 +12261,7 @@
           <p:cNvPr id="2" name="">
             <a:extLst xmlns:a="http://schemas.openxmlformats.org/drawingml/2006/main">
               <a:ext uri="{FF2B5EF4-FFF2-40B4-BE49-F238E27FC236}">
-                <a16:creationId xmlns:a16="http://schemas.microsoft.com/office/drawing/2014/main" id="{A2D06554-DAF9-4FCD-AC76-D24BDC07E524}"/>
+                <a16:creationId xmlns:a16="http://schemas.microsoft.com/office/drawing/2014/main" id="{84C13C7C-CFCD-4DFE-B8E5-20B826C6A185}"/>
               </a:ext>
             </a:extLst>
           </p:cNvPr>
@@ -12012,7 +12318,7 @@
           <p:cNvPr id="3" name="">
             <a:extLst xmlns:a="http://schemas.openxmlformats.org/drawingml/2006/main">
               <a:ext uri="{FF2B5EF4-FFF2-40B4-BE49-F238E27FC236}">
-                <a16:creationId xmlns:a16="http://schemas.microsoft.com/office/drawing/2014/main" id="{A5FB76BF-E8B4-40F8-8765-C185C486514A}"/>
+                <a16:creationId xmlns:a16="http://schemas.microsoft.com/office/drawing/2014/main" id="{EF942988-03A9-462A-9889-DA00019C59AF}"/>
               </a:ext>
             </a:extLst>
           </p:cNvPr>
@@ -12044,7 +12350,7 @@
           <p:cNvPr id="4" name="">
             <a:extLst xmlns:a="http://schemas.openxmlformats.org/drawingml/2006/main">
               <a:ext uri="{FF2B5EF4-FFF2-40B4-BE49-F238E27FC236}">
-                <a16:creationId xmlns:a16="http://schemas.microsoft.com/office/drawing/2014/main" id="{4DC5CF1C-97EE-4C4B-B223-7BECB47D0DFC}"/>
+                <a16:creationId xmlns:a16="http://schemas.microsoft.com/office/drawing/2014/main" id="{C1103507-5F3C-43B1-BE53-7012A30D467A}"/>
               </a:ext>
             </a:extLst>
           </p:cNvPr>
@@ -12101,7 +12407,7 @@
           <p:cNvPr id="5" name="">
             <a:extLst xmlns:a="http://schemas.openxmlformats.org/drawingml/2006/main">
               <a:ext uri="{FF2B5EF4-FFF2-40B4-BE49-F238E27FC236}">
-                <a16:creationId xmlns:a16="http://schemas.microsoft.com/office/drawing/2014/main" id="{E31FC48A-10FE-45B8-82D5-D296E53F4FA9}"/>
+                <a16:creationId xmlns:a16="http://schemas.microsoft.com/office/drawing/2014/main" id="{EBEB9C90-0A09-4F05-ACAC-44CA2617615F}"/>
               </a:ext>
             </a:extLst>
           </p:cNvPr>
@@ -12158,7 +12464,7 @@
           <p:cNvPr id="6" name="">
             <a:extLst xmlns:a="http://schemas.openxmlformats.org/drawingml/2006/main">
               <a:ext uri="{FF2B5EF4-FFF2-40B4-BE49-F238E27FC236}">
-                <a16:creationId xmlns:a16="http://schemas.microsoft.com/office/drawing/2014/main" id="{EA7614A0-0B72-42AB-9249-9126BBDCF9B7}"/>
+                <a16:creationId xmlns:a16="http://schemas.microsoft.com/office/drawing/2014/main" id="{649FC5FB-958F-4799-9475-2DEEACED9AF8}"/>
               </a:ext>
             </a:extLst>
           </p:cNvPr>
@@ -12215,7 +12521,7 @@
           <p:cNvPr id="7" name="">
             <a:extLst xmlns:a="http://schemas.openxmlformats.org/drawingml/2006/main">
               <a:ext uri="{FF2B5EF4-FFF2-40B4-BE49-F238E27FC236}">
-                <a16:creationId xmlns:a16="http://schemas.microsoft.com/office/drawing/2014/main" id="{F1A44A95-DF2F-4C61-A70B-9784C0DAA2C5}"/>
+                <a16:creationId xmlns:a16="http://schemas.microsoft.com/office/drawing/2014/main" id="{1031A504-401E-4E5A-9B6C-B7C0BC584EC6}"/>
               </a:ext>
             </a:extLst>
           </p:cNvPr>
@@ -12247,7 +12553,7 @@
           <p:cNvPr id="8" name="">
             <a:extLst xmlns:a="http://schemas.openxmlformats.org/drawingml/2006/main">
               <a:ext uri="{FF2B5EF4-FFF2-40B4-BE49-F238E27FC236}">
-                <a16:creationId xmlns:a16="http://schemas.microsoft.com/office/drawing/2014/main" id="{A2A24FC5-B112-4001-9E32-706B05189F05}"/>
+                <a16:creationId xmlns:a16="http://schemas.microsoft.com/office/drawing/2014/main" id="{4632AD25-EFE8-438E-BF76-A74FDFFED840}"/>
               </a:ext>
             </a:extLst>
           </p:cNvPr>
@@ -12304,7 +12610,7 @@
           <p:cNvPr id="9" name="">
             <a:extLst xmlns:a="http://schemas.openxmlformats.org/drawingml/2006/main">
               <a:ext uri="{FF2B5EF4-FFF2-40B4-BE49-F238E27FC236}">
-                <a16:creationId xmlns:a16="http://schemas.microsoft.com/office/drawing/2014/main" id="{BBC89C88-60D4-436E-9B01-228313E85108}"/>
+                <a16:creationId xmlns:a16="http://schemas.microsoft.com/office/drawing/2014/main" id="{60E7F348-31AC-4B8D-B7C2-45AD04915BD6}"/>
               </a:ext>
             </a:extLst>
           </p:cNvPr>
@@ -12361,7 +12667,7 @@
           <p:cNvPr id="10" name="">
             <a:extLst xmlns:a="http://schemas.openxmlformats.org/drawingml/2006/main">
               <a:ext uri="{FF2B5EF4-FFF2-40B4-BE49-F238E27FC236}">
-                <a16:creationId xmlns:a16="http://schemas.microsoft.com/office/drawing/2014/main" id="{7A3326B8-955C-4521-ACEE-87D93884EC5F}"/>
+                <a16:creationId xmlns:a16="http://schemas.microsoft.com/office/drawing/2014/main" id="{43C548FE-5214-4CCF-BB1F-0AD71879B103}"/>
               </a:ext>
             </a:extLst>
           </p:cNvPr>
@@ -12395,7 +12701,7 @@
           <p:cNvPr id="11" name="">
             <a:extLst xmlns:a="http://schemas.openxmlformats.org/drawingml/2006/main">
               <a:ext uri="{FF2B5EF4-FFF2-40B4-BE49-F238E27FC236}">
-                <a16:creationId xmlns:a16="http://schemas.microsoft.com/office/drawing/2014/main" id="{31B89F82-B6ED-430E-8CE7-CEED4C18EC62}"/>
+                <a16:creationId xmlns:a16="http://schemas.microsoft.com/office/drawing/2014/main" id="{D94BDF36-CB5B-409C-8B6B-3FF549FED2A0}"/>
               </a:ext>
             </a:extLst>
           </p:cNvPr>
@@ -12427,7 +12733,7 @@
           <p:cNvPr id="12" name="">
             <a:extLst xmlns:a="http://schemas.openxmlformats.org/drawingml/2006/main">
               <a:ext uri="{FF2B5EF4-FFF2-40B4-BE49-F238E27FC236}">
-                <a16:creationId xmlns:a16="http://schemas.microsoft.com/office/drawing/2014/main" id="{193E9376-68E6-4A02-8910-3160A11C794D}"/>
+                <a16:creationId xmlns:a16="http://schemas.microsoft.com/office/drawing/2014/main" id="{7C4CF9C1-F1A1-4ABD-AF3E-3B064765CF37}"/>
               </a:ext>
             </a:extLst>
           </p:cNvPr>
@@ -12484,7 +12790,7 @@
           <p:cNvPr id="13" name="">
             <a:extLst xmlns:a="http://schemas.openxmlformats.org/drawingml/2006/main">
               <a:ext uri="{FF2B5EF4-FFF2-40B4-BE49-F238E27FC236}">
-                <a16:creationId xmlns:a16="http://schemas.microsoft.com/office/drawing/2014/main" id="{79AD7A82-2230-432D-A094-2EAF286D2F8E}"/>
+                <a16:creationId xmlns:a16="http://schemas.microsoft.com/office/drawing/2014/main" id="{DA48C51F-2488-425B-BA9B-900814E70D8E}"/>
               </a:ext>
             </a:extLst>
           </p:cNvPr>
@@ -12541,7 +12847,7 @@
           <p:cNvPr id="14" name="">
             <a:extLst xmlns:a="http://schemas.openxmlformats.org/drawingml/2006/main">
               <a:ext uri="{FF2B5EF4-FFF2-40B4-BE49-F238E27FC236}">
-                <a16:creationId xmlns:a16="http://schemas.microsoft.com/office/drawing/2014/main" id="{C566D945-7AF6-4EA9-9B4F-BE338E1B7482}"/>
+                <a16:creationId xmlns:a16="http://schemas.microsoft.com/office/drawing/2014/main" id="{CBA62BEB-122B-4DBC-9209-642B70304B52}"/>
               </a:ext>
             </a:extLst>
           </p:cNvPr>
@@ -12575,7 +12881,7 @@
           <p:cNvPr id="15" name="">
             <a:extLst xmlns:a="http://schemas.openxmlformats.org/drawingml/2006/main">
               <a:ext uri="{FF2B5EF4-FFF2-40B4-BE49-F238E27FC236}">
-                <a16:creationId xmlns:a16="http://schemas.microsoft.com/office/drawing/2014/main" id="{14D6C32F-AC45-41EB-AAFC-CD8FCAFA107B}"/>
+                <a16:creationId xmlns:a16="http://schemas.microsoft.com/office/drawing/2014/main" id="{63674397-C4F2-4B7C-B057-8D20AA0B328F}"/>
               </a:ext>
             </a:extLst>
           </p:cNvPr>
@@ -12607,7 +12913,7 @@
           <p:cNvPr id="16" name="">
             <a:extLst xmlns:a="http://schemas.openxmlformats.org/drawingml/2006/main">
               <a:ext uri="{FF2B5EF4-FFF2-40B4-BE49-F238E27FC236}">
-                <a16:creationId xmlns:a16="http://schemas.microsoft.com/office/drawing/2014/main" id="{07D31501-5704-4271-94DC-32FB0DDDBF79}"/>
+                <a16:creationId xmlns:a16="http://schemas.microsoft.com/office/drawing/2014/main" id="{E5515C2D-9B10-484F-9F0B-70AB34E71286}"/>
               </a:ext>
             </a:extLst>
           </p:cNvPr>
@@ -12664,7 +12970,7 @@
           <p:cNvPr id="17" name="">
             <a:extLst xmlns:a="http://schemas.openxmlformats.org/drawingml/2006/main">
               <a:ext uri="{FF2B5EF4-FFF2-40B4-BE49-F238E27FC236}">
-                <a16:creationId xmlns:a16="http://schemas.microsoft.com/office/drawing/2014/main" id="{25FFEC1D-BADE-4BCF-AAE1-5E3F6B0E8EBA}"/>
+                <a16:creationId xmlns:a16="http://schemas.microsoft.com/office/drawing/2014/main" id="{FEC3A61C-69D7-47B5-8B92-DFA3172DEDEC}"/>
               </a:ext>
             </a:extLst>
           </p:cNvPr>
@@ -12721,7 +13027,7 @@
           <p:cNvPr id="18" name="">
             <a:extLst xmlns:a="http://schemas.openxmlformats.org/drawingml/2006/main">
               <a:ext uri="{FF2B5EF4-FFF2-40B4-BE49-F238E27FC236}">
-                <a16:creationId xmlns:a16="http://schemas.microsoft.com/office/drawing/2014/main" id="{34F07090-B3C5-4100-8EEA-B52F7D5C2593}"/>
+                <a16:creationId xmlns:a16="http://schemas.microsoft.com/office/drawing/2014/main" id="{C20ADFAD-A187-4ED2-AE88-B3F4EB1AB3AA}"/>
               </a:ext>
             </a:extLst>
           </p:cNvPr>
@@ -12755,7 +13061,7 @@
           <p:cNvPr id="19" name="">
             <a:extLst xmlns:a="http://schemas.openxmlformats.org/drawingml/2006/main">
               <a:ext uri="{FF2B5EF4-FFF2-40B4-BE49-F238E27FC236}">
-                <a16:creationId xmlns:a16="http://schemas.microsoft.com/office/drawing/2014/main" id="{84803638-ADEF-46C7-8143-5D6C24FEE1EF}"/>
+                <a16:creationId xmlns:a16="http://schemas.microsoft.com/office/drawing/2014/main" id="{EF70E196-14FB-47D0-BD31-3C9FF9BBDB87}"/>
               </a:ext>
             </a:extLst>
           </p:cNvPr>
@@ -12787,7 +13093,7 @@
           <p:cNvPr id="20" name="">
             <a:extLst xmlns:a="http://schemas.openxmlformats.org/drawingml/2006/main">
               <a:ext uri="{FF2B5EF4-FFF2-40B4-BE49-F238E27FC236}">
-                <a16:creationId xmlns:a16="http://schemas.microsoft.com/office/drawing/2014/main" id="{233CDFC1-1DAD-44D2-952A-8F795ABF6504}"/>
+                <a16:creationId xmlns:a16="http://schemas.microsoft.com/office/drawing/2014/main" id="{62E83956-DACB-449C-AE0F-907A31A8AD13}"/>
               </a:ext>
             </a:extLst>
           </p:cNvPr>
@@ -12844,7 +13150,7 @@
           <p:cNvPr id="21" name="">
             <a:extLst xmlns:a="http://schemas.openxmlformats.org/drawingml/2006/main">
               <a:ext uri="{FF2B5EF4-FFF2-40B4-BE49-F238E27FC236}">
-                <a16:creationId xmlns:a16="http://schemas.microsoft.com/office/drawing/2014/main" id="{12B0DF47-C8C7-443C-AB4F-8BB70DCBE433}"/>
+                <a16:creationId xmlns:a16="http://schemas.microsoft.com/office/drawing/2014/main" id="{313155B2-2081-4F96-B099-B5A4E9578869}"/>
               </a:ext>
             </a:extLst>
           </p:cNvPr>
@@ -12901,7 +13207,7 @@
           <p:cNvPr id="22" name="">
             <a:extLst xmlns:a="http://schemas.openxmlformats.org/drawingml/2006/main">
               <a:ext uri="{FF2B5EF4-FFF2-40B4-BE49-F238E27FC236}">
-                <a16:creationId xmlns:a16="http://schemas.microsoft.com/office/drawing/2014/main" id="{863DFC8D-4585-466F-B7A9-BAD42CF14966}"/>
+                <a16:creationId xmlns:a16="http://schemas.microsoft.com/office/drawing/2014/main" id="{C056BB0B-1B71-4E46-9C1F-00919B777C00}"/>
               </a:ext>
             </a:extLst>
           </p:cNvPr>
@@ -12956,7 +13262,7 @@
     </p:spTree>
     <p:extLst>
       <p:ext uri="{BB962C8B-B14F-4D97-AF65-F5344CB8AC3E}">
-        <p14:creationId xmlns:p14="http://schemas.microsoft.com/office/powerpoint/2010/main" val="140958890"/>
+        <p14:creationId xmlns:p14="http://schemas.microsoft.com/office/powerpoint/2010/main" val="116824097"/>
       </p:ext>
     </p:extLst>
   </p:cSld>
@@ -13157,7 +13463,7 @@
           <p:cNvPr id="22" name="">
             <a:extLst xmlns:a="http://schemas.openxmlformats.org/drawingml/2006/main">
               <a:ext uri="{FF2B5EF4-FFF2-40B4-BE49-F238E27FC236}">
-                <a16:creationId xmlns:a16="http://schemas.microsoft.com/office/drawing/2014/main" id="{3CBB6880-EBC5-413D-A0B1-9584373851C2}"/>
+                <a16:creationId xmlns:a16="http://schemas.microsoft.com/office/drawing/2014/main" id="{01D13859-8B9E-44EC-B545-F315E8C48566}"/>
               </a:ext>
             </a:extLst>
           </p:cNvPr>
@@ -13189,7 +13495,7 @@
           <p:cNvPr id="2" name="">
             <a:extLst xmlns:a="http://schemas.openxmlformats.org/drawingml/2006/main">
               <a:ext uri="{FF2B5EF4-FFF2-40B4-BE49-F238E27FC236}">
-                <a16:creationId xmlns:a16="http://schemas.microsoft.com/office/drawing/2014/main" id="{839B55D8-D190-41AB-93C6-C490A5320A71}"/>
+                <a16:creationId xmlns:a16="http://schemas.microsoft.com/office/drawing/2014/main" id="{CDCCE5C2-9EE9-4C3C-B796-8585593EBE1C}"/>
               </a:ext>
             </a:extLst>
           </p:cNvPr>
@@ -13246,7 +13552,7 @@
           <p:cNvPr id="3" name="">
             <a:extLst xmlns:a="http://schemas.openxmlformats.org/drawingml/2006/main">
               <a:ext uri="{FF2B5EF4-FFF2-40B4-BE49-F238E27FC236}">
-                <a16:creationId xmlns:a16="http://schemas.microsoft.com/office/drawing/2014/main" id="{20E2AFC3-A6BF-4524-9F8B-22BECDB21C36}"/>
+                <a16:creationId xmlns:a16="http://schemas.microsoft.com/office/drawing/2014/main" id="{109E3404-1EBB-47F1-BB76-6ECE9444B029}"/>
               </a:ext>
             </a:extLst>
           </p:cNvPr>
@@ -13278,7 +13584,7 @@
           <p:cNvPr id="4" name="">
             <a:extLst xmlns:a="http://schemas.openxmlformats.org/drawingml/2006/main">
               <a:ext uri="{FF2B5EF4-FFF2-40B4-BE49-F238E27FC236}">
-                <a16:creationId xmlns:a16="http://schemas.microsoft.com/office/drawing/2014/main" id="{BEA9FD40-91F5-4DB7-93FE-A3B2A17F6742}"/>
+                <a16:creationId xmlns:a16="http://schemas.microsoft.com/office/drawing/2014/main" id="{26CB460E-1529-4954-9531-ED6386314E8C}"/>
               </a:ext>
             </a:extLst>
           </p:cNvPr>
@@ -13335,7 +13641,7 @@
           <p:cNvPr id="5" name="">
             <a:extLst xmlns:a="http://schemas.openxmlformats.org/drawingml/2006/main">
               <a:ext uri="{FF2B5EF4-FFF2-40B4-BE49-F238E27FC236}">
-                <a16:creationId xmlns:a16="http://schemas.microsoft.com/office/drawing/2014/main" id="{C46541D6-5EDF-41DE-988B-6ECCCA2F9FFD}"/>
+                <a16:creationId xmlns:a16="http://schemas.microsoft.com/office/drawing/2014/main" id="{B3B55E36-C4F7-4EF1-B3B4-60F9086FEC28}"/>
               </a:ext>
             </a:extLst>
           </p:cNvPr>
@@ -13392,7 +13698,7 @@
           <p:cNvPr id="6" name="">
             <a:extLst xmlns:a="http://schemas.openxmlformats.org/drawingml/2006/main">
               <a:ext uri="{FF2B5EF4-FFF2-40B4-BE49-F238E27FC236}">
-                <a16:creationId xmlns:a16="http://schemas.microsoft.com/office/drawing/2014/main" id="{02A4FB87-C999-4676-BF1D-77CD1B4F00D3}"/>
+                <a16:creationId xmlns:a16="http://schemas.microsoft.com/office/drawing/2014/main" id="{6D465165-1A70-4CF6-A523-322810A9C2F9}"/>
               </a:ext>
             </a:extLst>
           </p:cNvPr>
@@ -13449,7 +13755,7 @@
           <p:cNvPr id="7" name="">
             <a:extLst xmlns:a="http://schemas.openxmlformats.org/drawingml/2006/main">
               <a:ext uri="{FF2B5EF4-FFF2-40B4-BE49-F238E27FC236}">
-                <a16:creationId xmlns:a16="http://schemas.microsoft.com/office/drawing/2014/main" id="{AA39C14B-4A5F-4DD3-8889-8CC4DCAC4CE3}"/>
+                <a16:creationId xmlns:a16="http://schemas.microsoft.com/office/drawing/2014/main" id="{BDD69F3C-DE16-4ED4-BB14-33C2548543D4}"/>
               </a:ext>
             </a:extLst>
           </p:cNvPr>
@@ -13481,7 +13787,7 @@
           <p:cNvPr id="8" name="">
             <a:extLst xmlns:a="http://schemas.openxmlformats.org/drawingml/2006/main">
               <a:ext uri="{FF2B5EF4-FFF2-40B4-BE49-F238E27FC236}">
-                <a16:creationId xmlns:a16="http://schemas.microsoft.com/office/drawing/2014/main" id="{2CD39203-EE93-4E66-85D9-2CAAD4E44DB5}"/>
+                <a16:creationId xmlns:a16="http://schemas.microsoft.com/office/drawing/2014/main" id="{88864BC4-C265-489F-B352-E6A2DEDBAAFD}"/>
               </a:ext>
             </a:extLst>
           </p:cNvPr>
@@ -13538,7 +13844,7 @@
           <p:cNvPr id="9" name="">
             <a:extLst xmlns:a="http://schemas.openxmlformats.org/drawingml/2006/main">
               <a:ext uri="{FF2B5EF4-FFF2-40B4-BE49-F238E27FC236}">
-                <a16:creationId xmlns:a16="http://schemas.microsoft.com/office/drawing/2014/main" id="{842A65C0-9D89-444B-A7D6-2B4C90A44E7A}"/>
+                <a16:creationId xmlns:a16="http://schemas.microsoft.com/office/drawing/2014/main" id="{7541EFA4-3848-4599-ABC5-22E69112414B}"/>
               </a:ext>
             </a:extLst>
           </p:cNvPr>
@@ -13595,7 +13901,7 @@
           <p:cNvPr id="10" name="">
             <a:extLst xmlns:a="http://schemas.openxmlformats.org/drawingml/2006/main">
               <a:ext uri="{FF2B5EF4-FFF2-40B4-BE49-F238E27FC236}">
-                <a16:creationId xmlns:a16="http://schemas.microsoft.com/office/drawing/2014/main" id="{BC5C44BB-CE40-4BD1-A104-8CBA3CDC3EC4}"/>
+                <a16:creationId xmlns:a16="http://schemas.microsoft.com/office/drawing/2014/main" id="{014FD08F-0E02-4E51-A236-4E3F3FD29B80}"/>
               </a:ext>
             </a:extLst>
           </p:cNvPr>
@@ -13629,7 +13935,7 @@
           <p:cNvPr id="11" name="">
             <a:extLst xmlns:a="http://schemas.openxmlformats.org/drawingml/2006/main">
               <a:ext uri="{FF2B5EF4-FFF2-40B4-BE49-F238E27FC236}">
-                <a16:creationId xmlns:a16="http://schemas.microsoft.com/office/drawing/2014/main" id="{1F45966C-8FAC-496F-A9A7-FACDF9ED5E20}"/>
+                <a16:creationId xmlns:a16="http://schemas.microsoft.com/office/drawing/2014/main" id="{F7EDD4BF-F5D7-4678-890C-EB9BC9ACC93B}"/>
               </a:ext>
             </a:extLst>
           </p:cNvPr>
@@ -13661,7 +13967,7 @@
           <p:cNvPr id="12" name="">
             <a:extLst xmlns:a="http://schemas.openxmlformats.org/drawingml/2006/main">
               <a:ext uri="{FF2B5EF4-FFF2-40B4-BE49-F238E27FC236}">
-                <a16:creationId xmlns:a16="http://schemas.microsoft.com/office/drawing/2014/main" id="{B273C546-189A-4292-BDFF-16C6B3B21ED7}"/>
+                <a16:creationId xmlns:a16="http://schemas.microsoft.com/office/drawing/2014/main" id="{4623AE3D-0C43-47D9-A7CA-51FCE4CF8103}"/>
               </a:ext>
             </a:extLst>
           </p:cNvPr>
@@ -13718,7 +14024,7 @@
           <p:cNvPr id="13" name="">
             <a:extLst xmlns:a="http://schemas.openxmlformats.org/drawingml/2006/main">
               <a:ext uri="{FF2B5EF4-FFF2-40B4-BE49-F238E27FC236}">
-                <a16:creationId xmlns:a16="http://schemas.microsoft.com/office/drawing/2014/main" id="{0F029B13-F62B-4E94-9836-AAC7CD07ABFD}"/>
+                <a16:creationId xmlns:a16="http://schemas.microsoft.com/office/drawing/2014/main" id="{6CCF5A4E-45F3-4386-A832-3CEEEAF0E325}"/>
               </a:ext>
             </a:extLst>
           </p:cNvPr>
@@ -13775,7 +14081,7 @@
           <p:cNvPr id="14" name="">
             <a:extLst xmlns:a="http://schemas.openxmlformats.org/drawingml/2006/main">
               <a:ext uri="{FF2B5EF4-FFF2-40B4-BE49-F238E27FC236}">
-                <a16:creationId xmlns:a16="http://schemas.microsoft.com/office/drawing/2014/main" id="{15D468DF-F1EE-458F-A764-774253E36C9E}"/>
+                <a16:creationId xmlns:a16="http://schemas.microsoft.com/office/drawing/2014/main" id="{5D41F219-9E42-4ECA-BB3E-214A85E61AE6}"/>
               </a:ext>
             </a:extLst>
           </p:cNvPr>
@@ -13809,7 +14115,7 @@
           <p:cNvPr id="15" name="">
             <a:extLst xmlns:a="http://schemas.openxmlformats.org/drawingml/2006/main">
               <a:ext uri="{FF2B5EF4-FFF2-40B4-BE49-F238E27FC236}">
-                <a16:creationId xmlns:a16="http://schemas.microsoft.com/office/drawing/2014/main" id="{91E004E3-7CA8-4279-9170-5BE26BD456FA}"/>
+                <a16:creationId xmlns:a16="http://schemas.microsoft.com/office/drawing/2014/main" id="{377474DC-4678-4B63-B307-73082D751691}"/>
               </a:ext>
             </a:extLst>
           </p:cNvPr>
@@ -13841,7 +14147,7 @@
           <p:cNvPr id="16" name="">
             <a:extLst xmlns:a="http://schemas.openxmlformats.org/drawingml/2006/main">
               <a:ext uri="{FF2B5EF4-FFF2-40B4-BE49-F238E27FC236}">
-                <a16:creationId xmlns:a16="http://schemas.microsoft.com/office/drawing/2014/main" id="{F507358D-B046-4170-8BCA-29CBE8968B2A}"/>
+                <a16:creationId xmlns:a16="http://schemas.microsoft.com/office/drawing/2014/main" id="{E79DF538-7B53-43DF-8D56-911FBBA07AF1}"/>
               </a:ext>
             </a:extLst>
           </p:cNvPr>
@@ -13898,7 +14204,7 @@
           <p:cNvPr id="17" name="">
             <a:extLst xmlns:a="http://schemas.openxmlformats.org/drawingml/2006/main">
               <a:ext uri="{FF2B5EF4-FFF2-40B4-BE49-F238E27FC236}">
-                <a16:creationId xmlns:a16="http://schemas.microsoft.com/office/drawing/2014/main" id="{AED64131-2B63-4B87-8EDC-2DFB39337D2E}"/>
+                <a16:creationId xmlns:a16="http://schemas.microsoft.com/office/drawing/2014/main" id="{AF307976-1EBF-4258-A5A7-808E49A72578}"/>
               </a:ext>
             </a:extLst>
           </p:cNvPr>
@@ -13955,7 +14261,7 @@
           <p:cNvPr id="18" name="">
             <a:extLst xmlns:a="http://schemas.openxmlformats.org/drawingml/2006/main">
               <a:ext uri="{FF2B5EF4-FFF2-40B4-BE49-F238E27FC236}">
-                <a16:creationId xmlns:a16="http://schemas.microsoft.com/office/drawing/2014/main" id="{C136C141-4A08-479B-9AD8-DA397A5CBCCA}"/>
+                <a16:creationId xmlns:a16="http://schemas.microsoft.com/office/drawing/2014/main" id="{6589D4B8-B9F7-4AA2-B4C6-92FB69BCC063}"/>
               </a:ext>
             </a:extLst>
           </p:cNvPr>
@@ -13989,7 +14295,7 @@
           <p:cNvPr id="19" name="">
             <a:extLst xmlns:a="http://schemas.openxmlformats.org/drawingml/2006/main">
               <a:ext uri="{FF2B5EF4-FFF2-40B4-BE49-F238E27FC236}">
-                <a16:creationId xmlns:a16="http://schemas.microsoft.com/office/drawing/2014/main" id="{4642F4CF-7C0C-4A4A-AB6D-2B88F730302D}"/>
+                <a16:creationId xmlns:a16="http://schemas.microsoft.com/office/drawing/2014/main" id="{DC1A8DC3-19EB-4EB6-B8E6-755ADA630912}"/>
               </a:ext>
             </a:extLst>
           </p:cNvPr>
@@ -14021,7 +14327,7 @@
           <p:cNvPr id="20" name="">
             <a:extLst xmlns:a="http://schemas.openxmlformats.org/drawingml/2006/main">
               <a:ext uri="{FF2B5EF4-FFF2-40B4-BE49-F238E27FC236}">
-                <a16:creationId xmlns:a16="http://schemas.microsoft.com/office/drawing/2014/main" id="{8C36E3A3-99E3-4E39-812A-131787D4486A}"/>
+                <a16:creationId xmlns:a16="http://schemas.microsoft.com/office/drawing/2014/main" id="{2FD164E7-F53E-422B-B64D-7D971DBF45A3}"/>
               </a:ext>
             </a:extLst>
           </p:cNvPr>
@@ -14078,7 +14384,7 @@
           <p:cNvPr id="21" name="">
             <a:extLst xmlns:a="http://schemas.openxmlformats.org/drawingml/2006/main">
               <a:ext uri="{FF2B5EF4-FFF2-40B4-BE49-F238E27FC236}">
-                <a16:creationId xmlns:a16="http://schemas.microsoft.com/office/drawing/2014/main" id="{C22244E3-ACD1-4942-A3A8-AEC0FEA402FF}"/>
+                <a16:creationId xmlns:a16="http://schemas.microsoft.com/office/drawing/2014/main" id="{43144B89-A65B-4EBD-83D9-E5227D190391}"/>
               </a:ext>
             </a:extLst>
           </p:cNvPr>
@@ -14133,7 +14439,7 @@
     </p:spTree>
     <p:extLst>
       <p:ext uri="{BB962C8B-B14F-4D97-AF65-F5344CB8AC3E}">
-        <p14:creationId xmlns:p14="http://schemas.microsoft.com/office/powerpoint/2010/main" val="105610319"/>
+        <p14:creationId xmlns:p14="http://schemas.microsoft.com/office/powerpoint/2010/main" val="993618231"/>
       </p:ext>
     </p:extLst>
   </p:cSld>
